--- a/Flappy Bird Enhanced.pptx
+++ b/Flappy Bird Enhanced.pptx
@@ -15,7 +15,7 @@
     <p:sldId id="263" r:id="rId10"/>
   </p:sldIdLst>
   <p:sldSz cx="9144000" cy="5143500"/>
-  <p:notesSz cx="9144000" cy="5143500"/>
+  <p:notesSz cx="7559675" cy="10691813"/>
 </p:presentation>
 </file>
 
@@ -70,7 +70,7 @@
         <p:txBody>
           <a:bodyPr/>
           <a:p>
-            <a:fld id="{D11D3572-4C95-4FCF-A392-8BC92DE3E9E1}" type="slidenum">
+            <a:fld id="{27D52013-D64C-422F-A849-61271013A84D}" type="slidenum">
               <a:t>&lt;#&gt;</a:t>
             </a:fld>
           </a:p>
@@ -121,7 +121,7 @@
       </p:grpSpPr>
       <p:sp>
         <p:nvSpPr>
-          <p:cNvPr id="26" name="PlaceHolder 1"/>
+          <p:cNvPr id="28" name="PlaceHolder 1"/>
           <p:cNvSpPr>
             <a:spLocks noGrp="1"/>
           </p:cNvSpPr>
@@ -131,8 +131,8 @@
         </p:nvSpPr>
         <p:spPr>
           <a:xfrm>
-            <a:off x="311760" y="444960"/>
-            <a:ext cx="8519760" cy="572040"/>
+            <a:off x="311760" y="105840"/>
+            <a:ext cx="8519400" cy="1250280"/>
           </a:xfrm>
           <a:prstGeom prst="rect">
             <a:avLst/>
@@ -147,21 +147,21 @@
             <a:noAutofit/>
           </a:bodyPr>
           <a:p>
-            <a:pPr indent="0">
+            <a:pPr indent="0" algn="ctr">
               <a:buNone/>
             </a:pPr>
-            <a:endParaRPr b="0" lang="ru-RU" sz="1400" spc="-1" strike="noStrike">
-              <a:solidFill>
-                <a:srgbClr val="000000"/>
-              </a:solidFill>
-              <a:latin typeface="Arial"/>
-            </a:endParaRPr>
-          </a:p>
-        </p:txBody>
-      </p:sp>
-      <p:sp>
-        <p:nvSpPr>
-          <p:cNvPr id="27" name="PlaceHolder 2"/>
+            <a:endParaRPr b="0" lang="ru-RU" sz="4400" spc="-1" strike="noStrike">
+              <a:solidFill>
+                <a:srgbClr val="000000"/>
+              </a:solidFill>
+              <a:latin typeface="XO Oriel"/>
+            </a:endParaRPr>
+          </a:p>
+        </p:txBody>
+      </p:sp>
+      <p:sp>
+        <p:nvSpPr>
+          <p:cNvPr id="29" name="PlaceHolder 2"/>
           <p:cNvSpPr>
             <a:spLocks noGrp="1"/>
           </p:cNvSpPr>
@@ -172,7 +172,7 @@
         <p:spPr>
           <a:xfrm>
             <a:off x="457200" y="1203480"/>
-            <a:ext cx="8229240" cy="1422720"/>
+            <a:ext cx="8228880" cy="1422360"/>
           </a:xfrm>
           <a:prstGeom prst="rect">
             <a:avLst/>
@@ -193,18 +193,18 @@
               </a:spcBef>
               <a:buNone/>
             </a:pPr>
-            <a:endParaRPr b="0" lang="ru-RU" sz="1400" spc="-1" strike="noStrike">
-              <a:solidFill>
-                <a:srgbClr val="000000"/>
-              </a:solidFill>
-              <a:latin typeface="Arial"/>
-            </a:endParaRPr>
-          </a:p>
-        </p:txBody>
-      </p:sp>
-      <p:sp>
-        <p:nvSpPr>
-          <p:cNvPr id="28" name="PlaceHolder 3"/>
+            <a:endParaRPr b="0" lang="ru-RU" sz="3200" spc="-1" strike="noStrike">
+              <a:solidFill>
+                <a:srgbClr val="000000"/>
+              </a:solidFill>
+              <a:latin typeface="XO Oriel"/>
+            </a:endParaRPr>
+          </a:p>
+        </p:txBody>
+      </p:sp>
+      <p:sp>
+        <p:nvSpPr>
+          <p:cNvPr id="30" name="PlaceHolder 3"/>
           <p:cNvSpPr>
             <a:spLocks noGrp="1"/>
           </p:cNvSpPr>
@@ -214,8 +214,8 @@
         </p:nvSpPr>
         <p:spPr>
           <a:xfrm>
-            <a:off x="457200" y="2761920"/>
-            <a:ext cx="8229240" cy="1422720"/>
+            <a:off x="457200" y="2761200"/>
+            <a:ext cx="8228880" cy="1422360"/>
           </a:xfrm>
           <a:prstGeom prst="rect">
             <a:avLst/>
@@ -236,11 +236,11 @@
               </a:spcBef>
               <a:buNone/>
             </a:pPr>
-            <a:endParaRPr b="0" lang="ru-RU" sz="1400" spc="-1" strike="noStrike">
-              <a:solidFill>
-                <a:srgbClr val="000000"/>
-              </a:solidFill>
-              <a:latin typeface="Arial"/>
+            <a:endParaRPr b="0" lang="ru-RU" sz="3200" spc="-1" strike="noStrike">
+              <a:solidFill>
+                <a:srgbClr val="000000"/>
+              </a:solidFill>
+              <a:latin typeface="XO Oriel"/>
             </a:endParaRPr>
           </a:p>
         </p:txBody>
@@ -279,7 +279,7 @@
         <p:txBody>
           <a:bodyPr/>
           <a:p>
-            <a:fld id="{02E86F78-F7EC-4584-A7E4-B0322CCE8BE8}" type="slidenum">
+            <a:fld id="{62583868-CE97-4F14-80DC-AA0EDB55717B}" type="slidenum">
               <a:t>&lt;#&gt;</a:t>
             </a:fld>
           </a:p>
@@ -330,7 +330,7 @@
       </p:grpSpPr>
       <p:sp>
         <p:nvSpPr>
-          <p:cNvPr id="29" name="PlaceHolder 1"/>
+          <p:cNvPr id="31" name="PlaceHolder 1"/>
           <p:cNvSpPr>
             <a:spLocks noGrp="1"/>
           </p:cNvSpPr>
@@ -340,8 +340,8 @@
         </p:nvSpPr>
         <p:spPr>
           <a:xfrm>
-            <a:off x="311760" y="444960"/>
-            <a:ext cx="8519760" cy="572040"/>
+            <a:off x="311760" y="105840"/>
+            <a:ext cx="8519400" cy="1250280"/>
           </a:xfrm>
           <a:prstGeom prst="rect">
             <a:avLst/>
@@ -356,21 +356,21 @@
             <a:noAutofit/>
           </a:bodyPr>
           <a:p>
-            <a:pPr indent="0">
+            <a:pPr indent="0" algn="ctr">
               <a:buNone/>
             </a:pPr>
-            <a:endParaRPr b="0" lang="ru-RU" sz="1400" spc="-1" strike="noStrike">
-              <a:solidFill>
-                <a:srgbClr val="000000"/>
-              </a:solidFill>
-              <a:latin typeface="Arial"/>
-            </a:endParaRPr>
-          </a:p>
-        </p:txBody>
-      </p:sp>
-      <p:sp>
-        <p:nvSpPr>
-          <p:cNvPr id="30" name="PlaceHolder 2"/>
+            <a:endParaRPr b="0" lang="ru-RU" sz="4400" spc="-1" strike="noStrike">
+              <a:solidFill>
+                <a:srgbClr val="000000"/>
+              </a:solidFill>
+              <a:latin typeface="XO Oriel"/>
+            </a:endParaRPr>
+          </a:p>
+        </p:txBody>
+      </p:sp>
+      <p:sp>
+        <p:nvSpPr>
+          <p:cNvPr id="32" name="PlaceHolder 2"/>
           <p:cNvSpPr>
             <a:spLocks noGrp="1"/>
           </p:cNvSpPr>
@@ -381,7 +381,7 @@
         <p:spPr>
           <a:xfrm>
             <a:off x="457200" y="1203480"/>
-            <a:ext cx="4015800" cy="1422720"/>
+            <a:ext cx="4015440" cy="1422360"/>
           </a:xfrm>
           <a:prstGeom prst="rect">
             <a:avLst/>
@@ -402,18 +402,18 @@
               </a:spcBef>
               <a:buNone/>
             </a:pPr>
-            <a:endParaRPr b="0" lang="ru-RU" sz="1400" spc="-1" strike="noStrike">
-              <a:solidFill>
-                <a:srgbClr val="000000"/>
-              </a:solidFill>
-              <a:latin typeface="Arial"/>
-            </a:endParaRPr>
-          </a:p>
-        </p:txBody>
-      </p:sp>
-      <p:sp>
-        <p:nvSpPr>
-          <p:cNvPr id="31" name="PlaceHolder 3"/>
+            <a:endParaRPr b="0" lang="ru-RU" sz="3200" spc="-1" strike="noStrike">
+              <a:solidFill>
+                <a:srgbClr val="000000"/>
+              </a:solidFill>
+              <a:latin typeface="XO Oriel"/>
+            </a:endParaRPr>
+          </a:p>
+        </p:txBody>
+      </p:sp>
+      <p:sp>
+        <p:nvSpPr>
+          <p:cNvPr id="33" name="PlaceHolder 3"/>
           <p:cNvSpPr>
             <a:spLocks noGrp="1"/>
           </p:cNvSpPr>
@@ -423,8 +423,8 @@
         </p:nvSpPr>
         <p:spPr>
           <a:xfrm>
-            <a:off x="4674240" y="1203480"/>
-            <a:ext cx="4015800" cy="1422720"/>
+            <a:off x="4673880" y="1203480"/>
+            <a:ext cx="4015440" cy="1422360"/>
           </a:xfrm>
           <a:prstGeom prst="rect">
             <a:avLst/>
@@ -445,18 +445,18 @@
               </a:spcBef>
               <a:buNone/>
             </a:pPr>
-            <a:endParaRPr b="0" lang="ru-RU" sz="1400" spc="-1" strike="noStrike">
-              <a:solidFill>
-                <a:srgbClr val="000000"/>
-              </a:solidFill>
-              <a:latin typeface="Arial"/>
-            </a:endParaRPr>
-          </a:p>
-        </p:txBody>
-      </p:sp>
-      <p:sp>
-        <p:nvSpPr>
-          <p:cNvPr id="32" name="PlaceHolder 4"/>
+            <a:endParaRPr b="0" lang="ru-RU" sz="3200" spc="-1" strike="noStrike">
+              <a:solidFill>
+                <a:srgbClr val="000000"/>
+              </a:solidFill>
+              <a:latin typeface="XO Oriel"/>
+            </a:endParaRPr>
+          </a:p>
+        </p:txBody>
+      </p:sp>
+      <p:sp>
+        <p:nvSpPr>
+          <p:cNvPr id="34" name="PlaceHolder 4"/>
           <p:cNvSpPr>
             <a:spLocks noGrp="1"/>
           </p:cNvSpPr>
@@ -466,8 +466,8 @@
         </p:nvSpPr>
         <p:spPr>
           <a:xfrm>
-            <a:off x="457200" y="2761920"/>
-            <a:ext cx="4015800" cy="1422720"/>
+            <a:off x="457200" y="2761200"/>
+            <a:ext cx="4015440" cy="1422360"/>
           </a:xfrm>
           <a:prstGeom prst="rect">
             <a:avLst/>
@@ -488,18 +488,18 @@
               </a:spcBef>
               <a:buNone/>
             </a:pPr>
-            <a:endParaRPr b="0" lang="ru-RU" sz="1400" spc="-1" strike="noStrike">
-              <a:solidFill>
-                <a:srgbClr val="000000"/>
-              </a:solidFill>
-              <a:latin typeface="Arial"/>
-            </a:endParaRPr>
-          </a:p>
-        </p:txBody>
-      </p:sp>
-      <p:sp>
-        <p:nvSpPr>
-          <p:cNvPr id="33" name="PlaceHolder 5"/>
+            <a:endParaRPr b="0" lang="ru-RU" sz="3200" spc="-1" strike="noStrike">
+              <a:solidFill>
+                <a:srgbClr val="000000"/>
+              </a:solidFill>
+              <a:latin typeface="XO Oriel"/>
+            </a:endParaRPr>
+          </a:p>
+        </p:txBody>
+      </p:sp>
+      <p:sp>
+        <p:nvSpPr>
+          <p:cNvPr id="35" name="PlaceHolder 5"/>
           <p:cNvSpPr>
             <a:spLocks noGrp="1"/>
           </p:cNvSpPr>
@@ -509,8 +509,8 @@
         </p:nvSpPr>
         <p:spPr>
           <a:xfrm>
-            <a:off x="4674240" y="2761920"/>
-            <a:ext cx="4015800" cy="1422720"/>
+            <a:off x="4673880" y="2761200"/>
+            <a:ext cx="4015440" cy="1422360"/>
           </a:xfrm>
           <a:prstGeom prst="rect">
             <a:avLst/>
@@ -531,11 +531,11 @@
               </a:spcBef>
               <a:buNone/>
             </a:pPr>
-            <a:endParaRPr b="0" lang="ru-RU" sz="1400" spc="-1" strike="noStrike">
-              <a:solidFill>
-                <a:srgbClr val="000000"/>
-              </a:solidFill>
-              <a:latin typeface="Arial"/>
+            <a:endParaRPr b="0" lang="ru-RU" sz="3200" spc="-1" strike="noStrike">
+              <a:solidFill>
+                <a:srgbClr val="000000"/>
+              </a:solidFill>
+              <a:latin typeface="XO Oriel"/>
             </a:endParaRPr>
           </a:p>
         </p:txBody>
@@ -574,7 +574,7 @@
         <p:txBody>
           <a:bodyPr/>
           <a:p>
-            <a:fld id="{C1C96D89-ABE3-40E1-950B-1BFA191E34AC}" type="slidenum">
+            <a:fld id="{81BF5549-7EF8-4C6F-B71F-AD58173C36D0}" type="slidenum">
               <a:t>&lt;#&gt;</a:t>
             </a:fld>
           </a:p>
@@ -625,7 +625,7 @@
       </p:grpSpPr>
       <p:sp>
         <p:nvSpPr>
-          <p:cNvPr id="34" name="PlaceHolder 1"/>
+          <p:cNvPr id="36" name="PlaceHolder 1"/>
           <p:cNvSpPr>
             <a:spLocks noGrp="1"/>
           </p:cNvSpPr>
@@ -635,8 +635,8 @@
         </p:nvSpPr>
         <p:spPr>
           <a:xfrm>
-            <a:off x="311760" y="444960"/>
-            <a:ext cx="8519760" cy="572040"/>
+            <a:off x="311760" y="105840"/>
+            <a:ext cx="8519400" cy="1250280"/>
           </a:xfrm>
           <a:prstGeom prst="rect">
             <a:avLst/>
@@ -651,21 +651,21 @@
             <a:noAutofit/>
           </a:bodyPr>
           <a:p>
-            <a:pPr indent="0">
+            <a:pPr indent="0" algn="ctr">
               <a:buNone/>
             </a:pPr>
-            <a:endParaRPr b="0" lang="ru-RU" sz="1400" spc="-1" strike="noStrike">
-              <a:solidFill>
-                <a:srgbClr val="000000"/>
-              </a:solidFill>
-              <a:latin typeface="Arial"/>
-            </a:endParaRPr>
-          </a:p>
-        </p:txBody>
-      </p:sp>
-      <p:sp>
-        <p:nvSpPr>
-          <p:cNvPr id="35" name="PlaceHolder 2"/>
+            <a:endParaRPr b="0" lang="ru-RU" sz="4400" spc="-1" strike="noStrike">
+              <a:solidFill>
+                <a:srgbClr val="000000"/>
+              </a:solidFill>
+              <a:latin typeface="XO Oriel"/>
+            </a:endParaRPr>
+          </a:p>
+        </p:txBody>
+      </p:sp>
+      <p:sp>
+        <p:nvSpPr>
+          <p:cNvPr id="37" name="PlaceHolder 2"/>
           <p:cNvSpPr>
             <a:spLocks noGrp="1"/>
           </p:cNvSpPr>
@@ -676,7 +676,7 @@
         <p:spPr>
           <a:xfrm>
             <a:off x="457200" y="1203480"/>
-            <a:ext cx="2649600" cy="1422720"/>
+            <a:ext cx="2649600" cy="1422360"/>
           </a:xfrm>
           <a:prstGeom prst="rect">
             <a:avLst/>
@@ -688,7 +688,7 @@
         </p:spPr>
         <p:txBody>
           <a:bodyPr lIns="0" rIns="0" tIns="0" bIns="0" anchor="t">
-            <a:normAutofit/>
+            <a:normAutofit fontScale="74992" lnSpcReduction="20000"/>
           </a:bodyPr>
           <a:p>
             <a:pPr indent="0">
@@ -697,18 +697,18 @@
               </a:spcBef>
               <a:buNone/>
             </a:pPr>
-            <a:endParaRPr b="0" lang="ru-RU" sz="1400" spc="-1" strike="noStrike">
-              <a:solidFill>
-                <a:srgbClr val="000000"/>
-              </a:solidFill>
-              <a:latin typeface="Arial"/>
-            </a:endParaRPr>
-          </a:p>
-        </p:txBody>
-      </p:sp>
-      <p:sp>
-        <p:nvSpPr>
-          <p:cNvPr id="36" name="PlaceHolder 3"/>
+            <a:endParaRPr b="0" lang="ru-RU" sz="3200" spc="-1" strike="noStrike">
+              <a:solidFill>
+                <a:srgbClr val="000000"/>
+              </a:solidFill>
+              <a:latin typeface="XO Oriel"/>
+            </a:endParaRPr>
+          </a:p>
+        </p:txBody>
+      </p:sp>
+      <p:sp>
+        <p:nvSpPr>
+          <p:cNvPr id="38" name="PlaceHolder 3"/>
           <p:cNvSpPr>
             <a:spLocks noGrp="1"/>
           </p:cNvSpPr>
@@ -719,7 +719,7 @@
         <p:spPr>
           <a:xfrm>
             <a:off x="3239640" y="1203480"/>
-            <a:ext cx="2649600" cy="1422720"/>
+            <a:ext cx="2649600" cy="1422360"/>
           </a:xfrm>
           <a:prstGeom prst="rect">
             <a:avLst/>
@@ -731,7 +731,7 @@
         </p:spPr>
         <p:txBody>
           <a:bodyPr lIns="0" rIns="0" tIns="0" bIns="0" anchor="t">
-            <a:normAutofit/>
+            <a:normAutofit fontScale="74992" lnSpcReduction="20000"/>
           </a:bodyPr>
           <a:p>
             <a:pPr indent="0">
@@ -740,18 +740,18 @@
               </a:spcBef>
               <a:buNone/>
             </a:pPr>
-            <a:endParaRPr b="0" lang="ru-RU" sz="1400" spc="-1" strike="noStrike">
-              <a:solidFill>
-                <a:srgbClr val="000000"/>
-              </a:solidFill>
-              <a:latin typeface="Arial"/>
-            </a:endParaRPr>
-          </a:p>
-        </p:txBody>
-      </p:sp>
-      <p:sp>
-        <p:nvSpPr>
-          <p:cNvPr id="37" name="PlaceHolder 4"/>
+            <a:endParaRPr b="0" lang="ru-RU" sz="3200" spc="-1" strike="noStrike">
+              <a:solidFill>
+                <a:srgbClr val="000000"/>
+              </a:solidFill>
+              <a:latin typeface="XO Oriel"/>
+            </a:endParaRPr>
+          </a:p>
+        </p:txBody>
+      </p:sp>
+      <p:sp>
+        <p:nvSpPr>
+          <p:cNvPr id="39" name="PlaceHolder 4"/>
           <p:cNvSpPr>
             <a:spLocks noGrp="1"/>
           </p:cNvSpPr>
@@ -762,7 +762,7 @@
         <p:spPr>
           <a:xfrm>
             <a:off x="6022080" y="1203480"/>
-            <a:ext cx="2649600" cy="1422720"/>
+            <a:ext cx="2649600" cy="1422360"/>
           </a:xfrm>
           <a:prstGeom prst="rect">
             <a:avLst/>
@@ -774,7 +774,7 @@
         </p:spPr>
         <p:txBody>
           <a:bodyPr lIns="0" rIns="0" tIns="0" bIns="0" anchor="t">
-            <a:normAutofit/>
+            <a:normAutofit fontScale="74992" lnSpcReduction="20000"/>
           </a:bodyPr>
           <a:p>
             <a:pPr indent="0">
@@ -783,18 +783,18 @@
               </a:spcBef>
               <a:buNone/>
             </a:pPr>
-            <a:endParaRPr b="0" lang="ru-RU" sz="1400" spc="-1" strike="noStrike">
-              <a:solidFill>
-                <a:srgbClr val="000000"/>
-              </a:solidFill>
-              <a:latin typeface="Arial"/>
-            </a:endParaRPr>
-          </a:p>
-        </p:txBody>
-      </p:sp>
-      <p:sp>
-        <p:nvSpPr>
-          <p:cNvPr id="38" name="PlaceHolder 5"/>
+            <a:endParaRPr b="0" lang="ru-RU" sz="3200" spc="-1" strike="noStrike">
+              <a:solidFill>
+                <a:srgbClr val="000000"/>
+              </a:solidFill>
+              <a:latin typeface="XO Oriel"/>
+            </a:endParaRPr>
+          </a:p>
+        </p:txBody>
+      </p:sp>
+      <p:sp>
+        <p:nvSpPr>
+          <p:cNvPr id="40" name="PlaceHolder 5"/>
           <p:cNvSpPr>
             <a:spLocks noGrp="1"/>
           </p:cNvSpPr>
@@ -804,8 +804,8 @@
         </p:nvSpPr>
         <p:spPr>
           <a:xfrm>
-            <a:off x="457200" y="2761920"/>
-            <a:ext cx="2649600" cy="1422720"/>
+            <a:off x="457200" y="2761200"/>
+            <a:ext cx="2649600" cy="1422360"/>
           </a:xfrm>
           <a:prstGeom prst="rect">
             <a:avLst/>
@@ -817,7 +817,7 @@
         </p:spPr>
         <p:txBody>
           <a:bodyPr lIns="0" rIns="0" tIns="0" bIns="0" anchor="t">
-            <a:normAutofit/>
+            <a:normAutofit fontScale="74992" lnSpcReduction="20000"/>
           </a:bodyPr>
           <a:p>
             <a:pPr indent="0">
@@ -826,18 +826,18 @@
               </a:spcBef>
               <a:buNone/>
             </a:pPr>
-            <a:endParaRPr b="0" lang="ru-RU" sz="1400" spc="-1" strike="noStrike">
-              <a:solidFill>
-                <a:srgbClr val="000000"/>
-              </a:solidFill>
-              <a:latin typeface="Arial"/>
-            </a:endParaRPr>
-          </a:p>
-        </p:txBody>
-      </p:sp>
-      <p:sp>
-        <p:nvSpPr>
-          <p:cNvPr id="39" name="PlaceHolder 6"/>
+            <a:endParaRPr b="0" lang="ru-RU" sz="3200" spc="-1" strike="noStrike">
+              <a:solidFill>
+                <a:srgbClr val="000000"/>
+              </a:solidFill>
+              <a:latin typeface="XO Oriel"/>
+            </a:endParaRPr>
+          </a:p>
+        </p:txBody>
+      </p:sp>
+      <p:sp>
+        <p:nvSpPr>
+          <p:cNvPr id="41" name="PlaceHolder 6"/>
           <p:cNvSpPr>
             <a:spLocks noGrp="1"/>
           </p:cNvSpPr>
@@ -847,8 +847,8 @@
         </p:nvSpPr>
         <p:spPr>
           <a:xfrm>
-            <a:off x="3239640" y="2761920"/>
-            <a:ext cx="2649600" cy="1422720"/>
+            <a:off x="3239640" y="2761200"/>
+            <a:ext cx="2649600" cy="1422360"/>
           </a:xfrm>
           <a:prstGeom prst="rect">
             <a:avLst/>
@@ -860,7 +860,7 @@
         </p:spPr>
         <p:txBody>
           <a:bodyPr lIns="0" rIns="0" tIns="0" bIns="0" anchor="t">
-            <a:normAutofit/>
+            <a:normAutofit fontScale="74992" lnSpcReduction="20000"/>
           </a:bodyPr>
           <a:p>
             <a:pPr indent="0">
@@ -869,18 +869,18 @@
               </a:spcBef>
               <a:buNone/>
             </a:pPr>
-            <a:endParaRPr b="0" lang="ru-RU" sz="1400" spc="-1" strike="noStrike">
-              <a:solidFill>
-                <a:srgbClr val="000000"/>
-              </a:solidFill>
-              <a:latin typeface="Arial"/>
-            </a:endParaRPr>
-          </a:p>
-        </p:txBody>
-      </p:sp>
-      <p:sp>
-        <p:nvSpPr>
-          <p:cNvPr id="40" name="PlaceHolder 7"/>
+            <a:endParaRPr b="0" lang="ru-RU" sz="3200" spc="-1" strike="noStrike">
+              <a:solidFill>
+                <a:srgbClr val="000000"/>
+              </a:solidFill>
+              <a:latin typeface="XO Oriel"/>
+            </a:endParaRPr>
+          </a:p>
+        </p:txBody>
+      </p:sp>
+      <p:sp>
+        <p:nvSpPr>
+          <p:cNvPr id="42" name="PlaceHolder 7"/>
           <p:cNvSpPr>
             <a:spLocks noGrp="1"/>
           </p:cNvSpPr>
@@ -890,8 +890,8 @@
         </p:nvSpPr>
         <p:spPr>
           <a:xfrm>
-            <a:off x="6022080" y="2761920"/>
-            <a:ext cx="2649600" cy="1422720"/>
+            <a:off x="6022080" y="2761200"/>
+            <a:ext cx="2649600" cy="1422360"/>
           </a:xfrm>
           <a:prstGeom prst="rect">
             <a:avLst/>
@@ -903,7 +903,7 @@
         </p:spPr>
         <p:txBody>
           <a:bodyPr lIns="0" rIns="0" tIns="0" bIns="0" anchor="t">
-            <a:normAutofit/>
+            <a:normAutofit fontScale="74992" lnSpcReduction="20000"/>
           </a:bodyPr>
           <a:p>
             <a:pPr indent="0">
@@ -912,11 +912,11 @@
               </a:spcBef>
               <a:buNone/>
             </a:pPr>
-            <a:endParaRPr b="0" lang="ru-RU" sz="1400" spc="-1" strike="noStrike">
-              <a:solidFill>
-                <a:srgbClr val="000000"/>
-              </a:solidFill>
-              <a:latin typeface="Arial"/>
+            <a:endParaRPr b="0" lang="ru-RU" sz="3200" spc="-1" strike="noStrike">
+              <a:solidFill>
+                <a:srgbClr val="000000"/>
+              </a:solidFill>
+              <a:latin typeface="XO Oriel"/>
             </a:endParaRPr>
           </a:p>
         </p:txBody>
@@ -955,7 +955,7 @@
         <p:txBody>
           <a:bodyPr/>
           <a:p>
-            <a:fld id="{05807B9B-3987-4155-8C9F-F3C79DFC8A97}" type="slidenum">
+            <a:fld id="{3C0252D0-0E36-412E-A6A6-2E50218C7E13}" type="slidenum">
               <a:t>&lt;#&gt;</a:t>
             </a:fld>
           </a:p>
@@ -1006,7 +1006,7 @@
       </p:grpSpPr>
       <p:sp>
         <p:nvSpPr>
-          <p:cNvPr id="5" name="PlaceHolder 1"/>
+          <p:cNvPr id="7" name="PlaceHolder 1"/>
           <p:cNvSpPr>
             <a:spLocks noGrp="1"/>
           </p:cNvSpPr>
@@ -1016,8 +1016,8 @@
         </p:nvSpPr>
         <p:spPr>
           <a:xfrm>
-            <a:off x="311760" y="444960"/>
-            <a:ext cx="8519760" cy="572040"/>
+            <a:off x="311760" y="105840"/>
+            <a:ext cx="8519400" cy="1250280"/>
           </a:xfrm>
           <a:prstGeom prst="rect">
             <a:avLst/>
@@ -1032,21 +1032,21 @@
             <a:noAutofit/>
           </a:bodyPr>
           <a:p>
-            <a:pPr indent="0">
+            <a:pPr indent="0" algn="ctr">
               <a:buNone/>
             </a:pPr>
-            <a:endParaRPr b="0" lang="ru-RU" sz="1400" spc="-1" strike="noStrike">
-              <a:solidFill>
-                <a:srgbClr val="000000"/>
-              </a:solidFill>
-              <a:latin typeface="Arial"/>
-            </a:endParaRPr>
-          </a:p>
-        </p:txBody>
-      </p:sp>
-      <p:sp>
-        <p:nvSpPr>
-          <p:cNvPr id="6" name="PlaceHolder 2"/>
+            <a:endParaRPr b="0" lang="ru-RU" sz="4400" spc="-1" strike="noStrike">
+              <a:solidFill>
+                <a:srgbClr val="000000"/>
+              </a:solidFill>
+              <a:latin typeface="XO Oriel"/>
+            </a:endParaRPr>
+          </a:p>
+        </p:txBody>
+      </p:sp>
+      <p:sp>
+        <p:nvSpPr>
+          <p:cNvPr id="8" name="PlaceHolder 2"/>
           <p:cNvSpPr>
             <a:spLocks noGrp="1"/>
           </p:cNvSpPr>
@@ -1057,7 +1057,7 @@
         <p:spPr>
           <a:xfrm>
             <a:off x="457200" y="1203480"/>
-            <a:ext cx="8229240" cy="2982960"/>
+            <a:ext cx="8228880" cy="2982600"/>
           </a:xfrm>
           <a:prstGeom prst="rect">
             <a:avLst/>
@@ -1118,7 +1118,7 @@
         <p:txBody>
           <a:bodyPr/>
           <a:p>
-            <a:fld id="{9F09B5F7-C682-4133-BC1B-A2B222454479}" type="slidenum">
+            <a:fld id="{33BD147E-5FDA-4598-8006-E855AD643354}" type="slidenum">
               <a:t>&lt;#&gt;</a:t>
             </a:fld>
           </a:p>
@@ -1169,7 +1169,7 @@
       </p:grpSpPr>
       <p:sp>
         <p:nvSpPr>
-          <p:cNvPr id="7" name="PlaceHolder 1"/>
+          <p:cNvPr id="9" name="PlaceHolder 1"/>
           <p:cNvSpPr>
             <a:spLocks noGrp="1"/>
           </p:cNvSpPr>
@@ -1179,8 +1179,8 @@
         </p:nvSpPr>
         <p:spPr>
           <a:xfrm>
-            <a:off x="311760" y="444960"/>
-            <a:ext cx="8519760" cy="572040"/>
+            <a:off x="311760" y="105840"/>
+            <a:ext cx="8519400" cy="1250280"/>
           </a:xfrm>
           <a:prstGeom prst="rect">
             <a:avLst/>
@@ -1195,21 +1195,21 @@
             <a:noAutofit/>
           </a:bodyPr>
           <a:p>
-            <a:pPr indent="0">
+            <a:pPr indent="0" algn="ctr">
               <a:buNone/>
             </a:pPr>
-            <a:endParaRPr b="0" lang="ru-RU" sz="1400" spc="-1" strike="noStrike">
-              <a:solidFill>
-                <a:srgbClr val="000000"/>
-              </a:solidFill>
-              <a:latin typeface="Arial"/>
-            </a:endParaRPr>
-          </a:p>
-        </p:txBody>
-      </p:sp>
-      <p:sp>
-        <p:nvSpPr>
-          <p:cNvPr id="8" name="PlaceHolder 2"/>
+            <a:endParaRPr b="0" lang="ru-RU" sz="4400" spc="-1" strike="noStrike">
+              <a:solidFill>
+                <a:srgbClr val="000000"/>
+              </a:solidFill>
+              <a:latin typeface="XO Oriel"/>
+            </a:endParaRPr>
+          </a:p>
+        </p:txBody>
+      </p:sp>
+      <p:sp>
+        <p:nvSpPr>
+          <p:cNvPr id="10" name="PlaceHolder 2"/>
           <p:cNvSpPr>
             <a:spLocks noGrp="1"/>
           </p:cNvSpPr>
@@ -1220,7 +1220,7 @@
         <p:spPr>
           <a:xfrm>
             <a:off x="457200" y="1203480"/>
-            <a:ext cx="8229240" cy="2982960"/>
+            <a:ext cx="8228880" cy="2982600"/>
           </a:xfrm>
           <a:prstGeom prst="rect">
             <a:avLst/>
@@ -1241,11 +1241,11 @@
               </a:spcBef>
               <a:buNone/>
             </a:pPr>
-            <a:endParaRPr b="0" lang="ru-RU" sz="1400" spc="-1" strike="noStrike">
-              <a:solidFill>
-                <a:srgbClr val="000000"/>
-              </a:solidFill>
-              <a:latin typeface="Arial"/>
+            <a:endParaRPr b="0" lang="ru-RU" sz="3200" spc="-1" strike="noStrike">
+              <a:solidFill>
+                <a:srgbClr val="000000"/>
+              </a:solidFill>
+              <a:latin typeface="XO Oriel"/>
             </a:endParaRPr>
           </a:p>
         </p:txBody>
@@ -1284,7 +1284,7 @@
         <p:txBody>
           <a:bodyPr/>
           <a:p>
-            <a:fld id="{2E0DBCAC-EE6B-46B7-BF9D-3F55CE481145}" type="slidenum">
+            <a:fld id="{74BEB91E-4EA3-42EB-A440-CB48A81EB8F2}" type="slidenum">
               <a:t>&lt;#&gt;</a:t>
             </a:fld>
           </a:p>
@@ -1335,7 +1335,7 @@
       </p:grpSpPr>
       <p:sp>
         <p:nvSpPr>
-          <p:cNvPr id="9" name="PlaceHolder 1"/>
+          <p:cNvPr id="11" name="PlaceHolder 1"/>
           <p:cNvSpPr>
             <a:spLocks noGrp="1"/>
           </p:cNvSpPr>
@@ -1345,8 +1345,8 @@
         </p:nvSpPr>
         <p:spPr>
           <a:xfrm>
-            <a:off x="311760" y="444960"/>
-            <a:ext cx="8519760" cy="572040"/>
+            <a:off x="311760" y="105840"/>
+            <a:ext cx="8519400" cy="1250280"/>
           </a:xfrm>
           <a:prstGeom prst="rect">
             <a:avLst/>
@@ -1361,21 +1361,21 @@
             <a:noAutofit/>
           </a:bodyPr>
           <a:p>
-            <a:pPr indent="0">
+            <a:pPr indent="0" algn="ctr">
               <a:buNone/>
             </a:pPr>
-            <a:endParaRPr b="0" lang="ru-RU" sz="1400" spc="-1" strike="noStrike">
-              <a:solidFill>
-                <a:srgbClr val="000000"/>
-              </a:solidFill>
-              <a:latin typeface="Arial"/>
-            </a:endParaRPr>
-          </a:p>
-        </p:txBody>
-      </p:sp>
-      <p:sp>
-        <p:nvSpPr>
-          <p:cNvPr id="10" name="PlaceHolder 2"/>
+            <a:endParaRPr b="0" lang="ru-RU" sz="4400" spc="-1" strike="noStrike">
+              <a:solidFill>
+                <a:srgbClr val="000000"/>
+              </a:solidFill>
+              <a:latin typeface="XO Oriel"/>
+            </a:endParaRPr>
+          </a:p>
+        </p:txBody>
+      </p:sp>
+      <p:sp>
+        <p:nvSpPr>
+          <p:cNvPr id="12" name="PlaceHolder 2"/>
           <p:cNvSpPr>
             <a:spLocks noGrp="1"/>
           </p:cNvSpPr>
@@ -1386,7 +1386,7 @@
         <p:spPr>
           <a:xfrm>
             <a:off x="457200" y="1203480"/>
-            <a:ext cx="4015800" cy="2982960"/>
+            <a:ext cx="4015440" cy="2982600"/>
           </a:xfrm>
           <a:prstGeom prst="rect">
             <a:avLst/>
@@ -1407,18 +1407,18 @@
               </a:spcBef>
               <a:buNone/>
             </a:pPr>
-            <a:endParaRPr b="0" lang="ru-RU" sz="1400" spc="-1" strike="noStrike">
-              <a:solidFill>
-                <a:srgbClr val="000000"/>
-              </a:solidFill>
-              <a:latin typeface="Arial"/>
-            </a:endParaRPr>
-          </a:p>
-        </p:txBody>
-      </p:sp>
-      <p:sp>
-        <p:nvSpPr>
-          <p:cNvPr id="11" name="PlaceHolder 3"/>
+            <a:endParaRPr b="0" lang="ru-RU" sz="3200" spc="-1" strike="noStrike">
+              <a:solidFill>
+                <a:srgbClr val="000000"/>
+              </a:solidFill>
+              <a:latin typeface="XO Oriel"/>
+            </a:endParaRPr>
+          </a:p>
+        </p:txBody>
+      </p:sp>
+      <p:sp>
+        <p:nvSpPr>
+          <p:cNvPr id="13" name="PlaceHolder 3"/>
           <p:cNvSpPr>
             <a:spLocks noGrp="1"/>
           </p:cNvSpPr>
@@ -1428,8 +1428,8 @@
         </p:nvSpPr>
         <p:spPr>
           <a:xfrm>
-            <a:off x="4674240" y="1203480"/>
-            <a:ext cx="4015800" cy="2982960"/>
+            <a:off x="4673880" y="1203480"/>
+            <a:ext cx="4015440" cy="2982600"/>
           </a:xfrm>
           <a:prstGeom prst="rect">
             <a:avLst/>
@@ -1450,11 +1450,11 @@
               </a:spcBef>
               <a:buNone/>
             </a:pPr>
-            <a:endParaRPr b="0" lang="ru-RU" sz="1400" spc="-1" strike="noStrike">
-              <a:solidFill>
-                <a:srgbClr val="000000"/>
-              </a:solidFill>
-              <a:latin typeface="Arial"/>
+            <a:endParaRPr b="0" lang="ru-RU" sz="3200" spc="-1" strike="noStrike">
+              <a:solidFill>
+                <a:srgbClr val="000000"/>
+              </a:solidFill>
+              <a:latin typeface="XO Oriel"/>
             </a:endParaRPr>
           </a:p>
         </p:txBody>
@@ -1493,7 +1493,7 @@
         <p:txBody>
           <a:bodyPr/>
           <a:p>
-            <a:fld id="{F2CC0BA8-816E-481C-9DBB-C668647F7443}" type="slidenum">
+            <a:fld id="{156DDA69-736A-4F2D-8E48-AA6A601FBF5C}" type="slidenum">
               <a:t>&lt;#&gt;</a:t>
             </a:fld>
           </a:p>
@@ -1544,7 +1544,7 @@
       </p:grpSpPr>
       <p:sp>
         <p:nvSpPr>
-          <p:cNvPr id="12" name="PlaceHolder 1"/>
+          <p:cNvPr id="14" name="PlaceHolder 1"/>
           <p:cNvSpPr>
             <a:spLocks noGrp="1"/>
           </p:cNvSpPr>
@@ -1554,8 +1554,8 @@
         </p:nvSpPr>
         <p:spPr>
           <a:xfrm>
-            <a:off x="311760" y="444960"/>
-            <a:ext cx="8519760" cy="572040"/>
+            <a:off x="311760" y="105840"/>
+            <a:ext cx="8519400" cy="1250280"/>
           </a:xfrm>
           <a:prstGeom prst="rect">
             <a:avLst/>
@@ -1570,14 +1570,14 @@
             <a:noAutofit/>
           </a:bodyPr>
           <a:p>
-            <a:pPr indent="0">
+            <a:pPr indent="0" algn="ctr">
               <a:buNone/>
             </a:pPr>
-            <a:endParaRPr b="0" lang="ru-RU" sz="1400" spc="-1" strike="noStrike">
-              <a:solidFill>
-                <a:srgbClr val="000000"/>
-              </a:solidFill>
-              <a:latin typeface="Arial"/>
+            <a:endParaRPr b="0" lang="ru-RU" sz="4400" spc="-1" strike="noStrike">
+              <a:solidFill>
+                <a:srgbClr val="000000"/>
+              </a:solidFill>
+              <a:latin typeface="XO Oriel"/>
             </a:endParaRPr>
           </a:p>
         </p:txBody>
@@ -1616,7 +1616,7 @@
         <p:txBody>
           <a:bodyPr/>
           <a:p>
-            <a:fld id="{3BFE60DE-3F4E-4441-9A8C-5A88FAF82EB9}" type="slidenum">
+            <a:fld id="{0276902D-3A4C-4240-9AF8-67A751906E89}" type="slidenum">
               <a:t>&lt;#&gt;</a:t>
             </a:fld>
           </a:p>
@@ -1667,7 +1667,7 @@
       </p:grpSpPr>
       <p:sp>
         <p:nvSpPr>
-          <p:cNvPr id="13" name="PlaceHolder 1"/>
+          <p:cNvPr id="15" name="PlaceHolder 1"/>
           <p:cNvSpPr>
             <a:spLocks noGrp="1"/>
           </p:cNvSpPr>
@@ -1678,7 +1678,7 @@
         <p:spPr>
           <a:xfrm>
             <a:off x="311760" y="444960"/>
-            <a:ext cx="8519760" cy="2652840"/>
+            <a:ext cx="8519400" cy="2651400"/>
           </a:xfrm>
           <a:prstGeom prst="rect">
             <a:avLst/>
@@ -1737,7 +1737,7 @@
         <p:txBody>
           <a:bodyPr/>
           <a:p>
-            <a:fld id="{B31C95E2-0E78-4E4B-B025-9C8A38C54D8B}" type="slidenum">
+            <a:fld id="{725E1CA6-9699-4260-BC70-231A7D5B04AA}" type="slidenum">
               <a:t>&lt;#&gt;</a:t>
             </a:fld>
           </a:p>
@@ -1788,7 +1788,7 @@
       </p:grpSpPr>
       <p:sp>
         <p:nvSpPr>
-          <p:cNvPr id="14" name="PlaceHolder 1"/>
+          <p:cNvPr id="16" name="PlaceHolder 1"/>
           <p:cNvSpPr>
             <a:spLocks noGrp="1"/>
           </p:cNvSpPr>
@@ -1798,8 +1798,8 @@
         </p:nvSpPr>
         <p:spPr>
           <a:xfrm>
-            <a:off x="311760" y="444960"/>
-            <a:ext cx="8519760" cy="572040"/>
+            <a:off x="311760" y="105840"/>
+            <a:ext cx="8519400" cy="1250280"/>
           </a:xfrm>
           <a:prstGeom prst="rect">
             <a:avLst/>
@@ -1814,21 +1814,21 @@
             <a:noAutofit/>
           </a:bodyPr>
           <a:p>
-            <a:pPr indent="0">
+            <a:pPr indent="0" algn="ctr">
               <a:buNone/>
             </a:pPr>
-            <a:endParaRPr b="0" lang="ru-RU" sz="1400" spc="-1" strike="noStrike">
-              <a:solidFill>
-                <a:srgbClr val="000000"/>
-              </a:solidFill>
-              <a:latin typeface="Arial"/>
-            </a:endParaRPr>
-          </a:p>
-        </p:txBody>
-      </p:sp>
-      <p:sp>
-        <p:nvSpPr>
-          <p:cNvPr id="15" name="PlaceHolder 2"/>
+            <a:endParaRPr b="0" lang="ru-RU" sz="4400" spc="-1" strike="noStrike">
+              <a:solidFill>
+                <a:srgbClr val="000000"/>
+              </a:solidFill>
+              <a:latin typeface="XO Oriel"/>
+            </a:endParaRPr>
+          </a:p>
+        </p:txBody>
+      </p:sp>
+      <p:sp>
+        <p:nvSpPr>
+          <p:cNvPr id="17" name="PlaceHolder 2"/>
           <p:cNvSpPr>
             <a:spLocks noGrp="1"/>
           </p:cNvSpPr>
@@ -1839,7 +1839,7 @@
         <p:spPr>
           <a:xfrm>
             <a:off x="457200" y="1203480"/>
-            <a:ext cx="4015800" cy="1422720"/>
+            <a:ext cx="4015440" cy="1422360"/>
           </a:xfrm>
           <a:prstGeom prst="rect">
             <a:avLst/>
@@ -1860,18 +1860,18 @@
               </a:spcBef>
               <a:buNone/>
             </a:pPr>
-            <a:endParaRPr b="0" lang="ru-RU" sz="1400" spc="-1" strike="noStrike">
-              <a:solidFill>
-                <a:srgbClr val="000000"/>
-              </a:solidFill>
-              <a:latin typeface="Arial"/>
-            </a:endParaRPr>
-          </a:p>
-        </p:txBody>
-      </p:sp>
-      <p:sp>
-        <p:nvSpPr>
-          <p:cNvPr id="16" name="PlaceHolder 3"/>
+            <a:endParaRPr b="0" lang="ru-RU" sz="3200" spc="-1" strike="noStrike">
+              <a:solidFill>
+                <a:srgbClr val="000000"/>
+              </a:solidFill>
+              <a:latin typeface="XO Oriel"/>
+            </a:endParaRPr>
+          </a:p>
+        </p:txBody>
+      </p:sp>
+      <p:sp>
+        <p:nvSpPr>
+          <p:cNvPr id="18" name="PlaceHolder 3"/>
           <p:cNvSpPr>
             <a:spLocks noGrp="1"/>
           </p:cNvSpPr>
@@ -1881,8 +1881,8 @@
         </p:nvSpPr>
         <p:spPr>
           <a:xfrm>
-            <a:off x="4674240" y="1203480"/>
-            <a:ext cx="4015800" cy="2982960"/>
+            <a:off x="4673880" y="1203480"/>
+            <a:ext cx="4015440" cy="2982600"/>
           </a:xfrm>
           <a:prstGeom prst="rect">
             <a:avLst/>
@@ -1903,18 +1903,18 @@
               </a:spcBef>
               <a:buNone/>
             </a:pPr>
-            <a:endParaRPr b="0" lang="ru-RU" sz="1400" spc="-1" strike="noStrike">
-              <a:solidFill>
-                <a:srgbClr val="000000"/>
-              </a:solidFill>
-              <a:latin typeface="Arial"/>
-            </a:endParaRPr>
-          </a:p>
-        </p:txBody>
-      </p:sp>
-      <p:sp>
-        <p:nvSpPr>
-          <p:cNvPr id="17" name="PlaceHolder 4"/>
+            <a:endParaRPr b="0" lang="ru-RU" sz="3200" spc="-1" strike="noStrike">
+              <a:solidFill>
+                <a:srgbClr val="000000"/>
+              </a:solidFill>
+              <a:latin typeface="XO Oriel"/>
+            </a:endParaRPr>
+          </a:p>
+        </p:txBody>
+      </p:sp>
+      <p:sp>
+        <p:nvSpPr>
+          <p:cNvPr id="19" name="PlaceHolder 4"/>
           <p:cNvSpPr>
             <a:spLocks noGrp="1"/>
           </p:cNvSpPr>
@@ -1924,8 +1924,8 @@
         </p:nvSpPr>
         <p:spPr>
           <a:xfrm>
-            <a:off x="457200" y="2761920"/>
-            <a:ext cx="4015800" cy="1422720"/>
+            <a:off x="457200" y="2761200"/>
+            <a:ext cx="4015440" cy="1422360"/>
           </a:xfrm>
           <a:prstGeom prst="rect">
             <a:avLst/>
@@ -1946,11 +1946,11 @@
               </a:spcBef>
               <a:buNone/>
             </a:pPr>
-            <a:endParaRPr b="0" lang="ru-RU" sz="1400" spc="-1" strike="noStrike">
-              <a:solidFill>
-                <a:srgbClr val="000000"/>
-              </a:solidFill>
-              <a:latin typeface="Arial"/>
+            <a:endParaRPr b="0" lang="ru-RU" sz="3200" spc="-1" strike="noStrike">
+              <a:solidFill>
+                <a:srgbClr val="000000"/>
+              </a:solidFill>
+              <a:latin typeface="XO Oriel"/>
             </a:endParaRPr>
           </a:p>
         </p:txBody>
@@ -1989,7 +1989,7 @@
         <p:txBody>
           <a:bodyPr/>
           <a:p>
-            <a:fld id="{8ADDC8FE-E7D8-48AA-8B26-8DEB8CDF0649}" type="slidenum">
+            <a:fld id="{7ECEF18B-F6BD-4EE7-A973-88C5A3E0BF0B}" type="slidenum">
               <a:t>&lt;#&gt;</a:t>
             </a:fld>
           </a:p>
@@ -2040,7 +2040,7 @@
       </p:grpSpPr>
       <p:sp>
         <p:nvSpPr>
-          <p:cNvPr id="18" name="PlaceHolder 1"/>
+          <p:cNvPr id="20" name="PlaceHolder 1"/>
           <p:cNvSpPr>
             <a:spLocks noGrp="1"/>
           </p:cNvSpPr>
@@ -2050,8 +2050,8 @@
         </p:nvSpPr>
         <p:spPr>
           <a:xfrm>
-            <a:off x="311760" y="444960"/>
-            <a:ext cx="8519760" cy="572040"/>
+            <a:off x="311760" y="105840"/>
+            <a:ext cx="8519400" cy="1250280"/>
           </a:xfrm>
           <a:prstGeom prst="rect">
             <a:avLst/>
@@ -2066,21 +2066,21 @@
             <a:noAutofit/>
           </a:bodyPr>
           <a:p>
-            <a:pPr indent="0">
+            <a:pPr indent="0" algn="ctr">
               <a:buNone/>
             </a:pPr>
-            <a:endParaRPr b="0" lang="ru-RU" sz="1400" spc="-1" strike="noStrike">
-              <a:solidFill>
-                <a:srgbClr val="000000"/>
-              </a:solidFill>
-              <a:latin typeface="Arial"/>
-            </a:endParaRPr>
-          </a:p>
-        </p:txBody>
-      </p:sp>
-      <p:sp>
-        <p:nvSpPr>
-          <p:cNvPr id="19" name="PlaceHolder 2"/>
+            <a:endParaRPr b="0" lang="ru-RU" sz="4400" spc="-1" strike="noStrike">
+              <a:solidFill>
+                <a:srgbClr val="000000"/>
+              </a:solidFill>
+              <a:latin typeface="XO Oriel"/>
+            </a:endParaRPr>
+          </a:p>
+        </p:txBody>
+      </p:sp>
+      <p:sp>
+        <p:nvSpPr>
+          <p:cNvPr id="21" name="PlaceHolder 2"/>
           <p:cNvSpPr>
             <a:spLocks noGrp="1"/>
           </p:cNvSpPr>
@@ -2091,7 +2091,7 @@
         <p:spPr>
           <a:xfrm>
             <a:off x="457200" y="1203480"/>
-            <a:ext cx="4015800" cy="2982960"/>
+            <a:ext cx="4015440" cy="2982600"/>
           </a:xfrm>
           <a:prstGeom prst="rect">
             <a:avLst/>
@@ -2112,18 +2112,18 @@
               </a:spcBef>
               <a:buNone/>
             </a:pPr>
-            <a:endParaRPr b="0" lang="ru-RU" sz="1400" spc="-1" strike="noStrike">
-              <a:solidFill>
-                <a:srgbClr val="000000"/>
-              </a:solidFill>
-              <a:latin typeface="Arial"/>
-            </a:endParaRPr>
-          </a:p>
-        </p:txBody>
-      </p:sp>
-      <p:sp>
-        <p:nvSpPr>
-          <p:cNvPr id="20" name="PlaceHolder 3"/>
+            <a:endParaRPr b="0" lang="ru-RU" sz="3200" spc="-1" strike="noStrike">
+              <a:solidFill>
+                <a:srgbClr val="000000"/>
+              </a:solidFill>
+              <a:latin typeface="XO Oriel"/>
+            </a:endParaRPr>
+          </a:p>
+        </p:txBody>
+      </p:sp>
+      <p:sp>
+        <p:nvSpPr>
+          <p:cNvPr id="22" name="PlaceHolder 3"/>
           <p:cNvSpPr>
             <a:spLocks noGrp="1"/>
           </p:cNvSpPr>
@@ -2133,8 +2133,8 @@
         </p:nvSpPr>
         <p:spPr>
           <a:xfrm>
-            <a:off x="4674240" y="1203480"/>
-            <a:ext cx="4015800" cy="1422720"/>
+            <a:off x="4673880" y="1203480"/>
+            <a:ext cx="4015440" cy="1422360"/>
           </a:xfrm>
           <a:prstGeom prst="rect">
             <a:avLst/>
@@ -2155,18 +2155,18 @@
               </a:spcBef>
               <a:buNone/>
             </a:pPr>
-            <a:endParaRPr b="0" lang="ru-RU" sz="1400" spc="-1" strike="noStrike">
-              <a:solidFill>
-                <a:srgbClr val="000000"/>
-              </a:solidFill>
-              <a:latin typeface="Arial"/>
-            </a:endParaRPr>
-          </a:p>
-        </p:txBody>
-      </p:sp>
-      <p:sp>
-        <p:nvSpPr>
-          <p:cNvPr id="21" name="PlaceHolder 4"/>
+            <a:endParaRPr b="0" lang="ru-RU" sz="3200" spc="-1" strike="noStrike">
+              <a:solidFill>
+                <a:srgbClr val="000000"/>
+              </a:solidFill>
+              <a:latin typeface="XO Oriel"/>
+            </a:endParaRPr>
+          </a:p>
+        </p:txBody>
+      </p:sp>
+      <p:sp>
+        <p:nvSpPr>
+          <p:cNvPr id="23" name="PlaceHolder 4"/>
           <p:cNvSpPr>
             <a:spLocks noGrp="1"/>
           </p:cNvSpPr>
@@ -2176,8 +2176,8 @@
         </p:nvSpPr>
         <p:spPr>
           <a:xfrm>
-            <a:off x="4674240" y="2761920"/>
-            <a:ext cx="4015800" cy="1422720"/>
+            <a:off x="4673880" y="2761200"/>
+            <a:ext cx="4015440" cy="1422360"/>
           </a:xfrm>
           <a:prstGeom prst="rect">
             <a:avLst/>
@@ -2198,11 +2198,11 @@
               </a:spcBef>
               <a:buNone/>
             </a:pPr>
-            <a:endParaRPr b="0" lang="ru-RU" sz="1400" spc="-1" strike="noStrike">
-              <a:solidFill>
-                <a:srgbClr val="000000"/>
-              </a:solidFill>
-              <a:latin typeface="Arial"/>
+            <a:endParaRPr b="0" lang="ru-RU" sz="3200" spc="-1" strike="noStrike">
+              <a:solidFill>
+                <a:srgbClr val="000000"/>
+              </a:solidFill>
+              <a:latin typeface="XO Oriel"/>
             </a:endParaRPr>
           </a:p>
         </p:txBody>
@@ -2241,7 +2241,7 @@
         <p:txBody>
           <a:bodyPr/>
           <a:p>
-            <a:fld id="{55124B68-493F-4B60-B1EB-AAFF7E33E847}" type="slidenum">
+            <a:fld id="{87F0EC71-012E-40B7-9EA0-8226CED84489}" type="slidenum">
               <a:t>&lt;#&gt;</a:t>
             </a:fld>
           </a:p>
@@ -2292,7 +2292,7 @@
       </p:grpSpPr>
       <p:sp>
         <p:nvSpPr>
-          <p:cNvPr id="22" name="PlaceHolder 1"/>
+          <p:cNvPr id="24" name="PlaceHolder 1"/>
           <p:cNvSpPr>
             <a:spLocks noGrp="1"/>
           </p:cNvSpPr>
@@ -2302,8 +2302,8 @@
         </p:nvSpPr>
         <p:spPr>
           <a:xfrm>
-            <a:off x="311760" y="444960"/>
-            <a:ext cx="8519760" cy="572040"/>
+            <a:off x="311760" y="105840"/>
+            <a:ext cx="8519400" cy="1250280"/>
           </a:xfrm>
           <a:prstGeom prst="rect">
             <a:avLst/>
@@ -2318,21 +2318,21 @@
             <a:noAutofit/>
           </a:bodyPr>
           <a:p>
-            <a:pPr indent="0">
+            <a:pPr indent="0" algn="ctr">
               <a:buNone/>
             </a:pPr>
-            <a:endParaRPr b="0" lang="ru-RU" sz="1400" spc="-1" strike="noStrike">
-              <a:solidFill>
-                <a:srgbClr val="000000"/>
-              </a:solidFill>
-              <a:latin typeface="Arial"/>
-            </a:endParaRPr>
-          </a:p>
-        </p:txBody>
-      </p:sp>
-      <p:sp>
-        <p:nvSpPr>
-          <p:cNvPr id="23" name="PlaceHolder 2"/>
+            <a:endParaRPr b="0" lang="ru-RU" sz="4400" spc="-1" strike="noStrike">
+              <a:solidFill>
+                <a:srgbClr val="000000"/>
+              </a:solidFill>
+              <a:latin typeface="XO Oriel"/>
+            </a:endParaRPr>
+          </a:p>
+        </p:txBody>
+      </p:sp>
+      <p:sp>
+        <p:nvSpPr>
+          <p:cNvPr id="25" name="PlaceHolder 2"/>
           <p:cNvSpPr>
             <a:spLocks noGrp="1"/>
           </p:cNvSpPr>
@@ -2343,7 +2343,7 @@
         <p:spPr>
           <a:xfrm>
             <a:off x="457200" y="1203480"/>
-            <a:ext cx="4015800" cy="1422720"/>
+            <a:ext cx="4015440" cy="1422360"/>
           </a:xfrm>
           <a:prstGeom prst="rect">
             <a:avLst/>
@@ -2364,18 +2364,18 @@
               </a:spcBef>
               <a:buNone/>
             </a:pPr>
-            <a:endParaRPr b="0" lang="ru-RU" sz="1400" spc="-1" strike="noStrike">
-              <a:solidFill>
-                <a:srgbClr val="000000"/>
-              </a:solidFill>
-              <a:latin typeface="Arial"/>
-            </a:endParaRPr>
-          </a:p>
-        </p:txBody>
-      </p:sp>
-      <p:sp>
-        <p:nvSpPr>
-          <p:cNvPr id="24" name="PlaceHolder 3"/>
+            <a:endParaRPr b="0" lang="ru-RU" sz="3200" spc="-1" strike="noStrike">
+              <a:solidFill>
+                <a:srgbClr val="000000"/>
+              </a:solidFill>
+              <a:latin typeface="XO Oriel"/>
+            </a:endParaRPr>
+          </a:p>
+        </p:txBody>
+      </p:sp>
+      <p:sp>
+        <p:nvSpPr>
+          <p:cNvPr id="26" name="PlaceHolder 3"/>
           <p:cNvSpPr>
             <a:spLocks noGrp="1"/>
           </p:cNvSpPr>
@@ -2385,8 +2385,8 @@
         </p:nvSpPr>
         <p:spPr>
           <a:xfrm>
-            <a:off x="4674240" y="1203480"/>
-            <a:ext cx="4015800" cy="1422720"/>
+            <a:off x="4673880" y="1203480"/>
+            <a:ext cx="4015440" cy="1422360"/>
           </a:xfrm>
           <a:prstGeom prst="rect">
             <a:avLst/>
@@ -2407,18 +2407,18 @@
               </a:spcBef>
               <a:buNone/>
             </a:pPr>
-            <a:endParaRPr b="0" lang="ru-RU" sz="1400" spc="-1" strike="noStrike">
-              <a:solidFill>
-                <a:srgbClr val="000000"/>
-              </a:solidFill>
-              <a:latin typeface="Arial"/>
-            </a:endParaRPr>
-          </a:p>
-        </p:txBody>
-      </p:sp>
-      <p:sp>
-        <p:nvSpPr>
-          <p:cNvPr id="25" name="PlaceHolder 4"/>
+            <a:endParaRPr b="0" lang="ru-RU" sz="3200" spc="-1" strike="noStrike">
+              <a:solidFill>
+                <a:srgbClr val="000000"/>
+              </a:solidFill>
+              <a:latin typeface="XO Oriel"/>
+            </a:endParaRPr>
+          </a:p>
+        </p:txBody>
+      </p:sp>
+      <p:sp>
+        <p:nvSpPr>
+          <p:cNvPr id="27" name="PlaceHolder 4"/>
           <p:cNvSpPr>
             <a:spLocks noGrp="1"/>
           </p:cNvSpPr>
@@ -2428,8 +2428,8 @@
         </p:nvSpPr>
         <p:spPr>
           <a:xfrm>
-            <a:off x="457200" y="2761920"/>
-            <a:ext cx="8229240" cy="1422720"/>
+            <a:off x="457200" y="2761200"/>
+            <a:ext cx="8228880" cy="1422360"/>
           </a:xfrm>
           <a:prstGeom prst="rect">
             <a:avLst/>
@@ -2450,11 +2450,11 @@
               </a:spcBef>
               <a:buNone/>
             </a:pPr>
-            <a:endParaRPr b="0" lang="ru-RU" sz="1400" spc="-1" strike="noStrike">
-              <a:solidFill>
-                <a:srgbClr val="000000"/>
-              </a:solidFill>
-              <a:latin typeface="Arial"/>
+            <a:endParaRPr b="0" lang="ru-RU" sz="3200" spc="-1" strike="noStrike">
+              <a:solidFill>
+                <a:srgbClr val="000000"/>
+              </a:solidFill>
+              <a:latin typeface="XO Oriel"/>
             </a:endParaRPr>
           </a:p>
         </p:txBody>
@@ -2493,7 +2493,7 @@
         <p:txBody>
           <a:bodyPr/>
           <a:p>
-            <a:fld id="{3195FD95-0B25-4C70-8F26-7E4F21056B9B}" type="slidenum">
+            <a:fld id="{85E12839-1D23-4913-8640-D0A13609620C}" type="slidenum">
               <a:t>&lt;#&gt;</a:t>
             </a:fld>
           </a:p>
@@ -2562,7 +2562,7 @@
         <p:spPr>
           <a:xfrm>
             <a:off x="311760" y="444960"/>
-            <a:ext cx="8519760" cy="572040"/>
+            <a:ext cx="8519400" cy="571680"/>
           </a:xfrm>
           <a:prstGeom prst="rect">
             <a:avLst/>
@@ -2585,7 +2585,7 @@
                 <a:solidFill>
                   <a:srgbClr val="000000"/>
                 </a:solidFill>
-                <a:latin typeface="Arial"/>
+                <a:latin typeface="XO Oriel"/>
               </a:rPr>
               <a:t>Для правки текста заглавия щёлкните мышью</a:t>
             </a:r>
@@ -2593,7 +2593,7 @@
               <a:solidFill>
                 <a:srgbClr val="000000"/>
               </a:solidFill>
-              <a:latin typeface="Arial"/>
+              <a:latin typeface="XO Oriel"/>
             </a:endParaRPr>
           </a:p>
         </p:txBody>
@@ -2605,13 +2605,688 @@
             <a:spLocks noGrp="1"/>
           </p:cNvSpPr>
           <p:nvPr>
+            <p:ph type="body"/>
+          </p:nvPr>
+        </p:nvSpPr>
+        <p:spPr>
+          <a:xfrm>
+            <a:off x="457200" y="1203480"/>
+            <a:ext cx="4015440" cy="1422360"/>
+          </a:xfrm>
+          <a:prstGeom prst="rect">
+            <a:avLst/>
+          </a:prstGeom>
+          <a:noFill/>
+          <a:ln w="0">
+            <a:noFill/>
+          </a:ln>
+        </p:spPr>
+        <p:txBody>
+          <a:bodyPr lIns="0" rIns="0" tIns="0" bIns="0" anchor="t">
+            <a:normAutofit fontScale="43333"/>
+          </a:bodyPr>
+          <a:p>
+            <a:pPr marL="432000" indent="-324000">
+              <a:spcBef>
+                <a:spcPts val="1417"/>
+              </a:spcBef>
+              <a:buClr>
+                <a:srgbClr val="000000"/>
+              </a:buClr>
+              <a:buSzPct val="45000"/>
+              <a:buFont typeface="Wingdings" charset="2"/>
+              <a:buChar char=""/>
+            </a:pPr>
+            <a:r>
+              <a:rPr b="0" lang="ru-RU" sz="1800" spc="-1" strike="noStrike">
+                <a:solidFill>
+                  <a:srgbClr val="000000"/>
+                </a:solidFill>
+                <a:latin typeface="XO Oriel"/>
+              </a:rPr>
+              <a:t>Для правки структуры щёлкните мышью</a:t>
+            </a:r>
+            <a:endParaRPr b="0" lang="ru-RU" sz="1800" spc="-1" strike="noStrike">
+              <a:solidFill>
+                <a:srgbClr val="000000"/>
+              </a:solidFill>
+              <a:latin typeface="XO Oriel"/>
+            </a:endParaRPr>
+          </a:p>
+          <a:p>
+            <a:pPr lvl="1" marL="864000" indent="-324000">
+              <a:spcBef>
+                <a:spcPts val="1134"/>
+              </a:spcBef>
+              <a:buClr>
+                <a:srgbClr val="000000"/>
+              </a:buClr>
+              <a:buSzPct val="75000"/>
+              <a:buFont typeface="Symbol" charset="2"/>
+              <a:buChar char=""/>
+            </a:pPr>
+            <a:r>
+              <a:rPr b="0" lang="ru-RU" sz="1800" spc="-1" strike="noStrike">
+                <a:solidFill>
+                  <a:srgbClr val="000000"/>
+                </a:solidFill>
+                <a:latin typeface="XO Oriel"/>
+              </a:rPr>
+              <a:t>Второй уровень структуры</a:t>
+            </a:r>
+            <a:endParaRPr b="0" lang="ru-RU" sz="1800" spc="-1" strike="noStrike">
+              <a:solidFill>
+                <a:srgbClr val="000000"/>
+              </a:solidFill>
+              <a:latin typeface="XO Oriel"/>
+            </a:endParaRPr>
+          </a:p>
+          <a:p>
+            <a:pPr lvl="2" marL="1296000" indent="-288000">
+              <a:spcBef>
+                <a:spcPts val="850"/>
+              </a:spcBef>
+              <a:buClr>
+                <a:srgbClr val="000000"/>
+              </a:buClr>
+              <a:buSzPct val="45000"/>
+              <a:buFont typeface="Wingdings" charset="2"/>
+              <a:buChar char=""/>
+            </a:pPr>
+            <a:r>
+              <a:rPr b="0" lang="ru-RU" sz="1800" spc="-1" strike="noStrike">
+                <a:solidFill>
+                  <a:srgbClr val="000000"/>
+                </a:solidFill>
+                <a:latin typeface="XO Oriel"/>
+              </a:rPr>
+              <a:t>Третий уровень структуры</a:t>
+            </a:r>
+            <a:endParaRPr b="0" lang="ru-RU" sz="1800" spc="-1" strike="noStrike">
+              <a:solidFill>
+                <a:srgbClr val="000000"/>
+              </a:solidFill>
+              <a:latin typeface="XO Oriel"/>
+            </a:endParaRPr>
+          </a:p>
+          <a:p>
+            <a:pPr lvl="3" marL="1728000" indent="-216000">
+              <a:spcBef>
+                <a:spcPts val="567"/>
+              </a:spcBef>
+              <a:buClr>
+                <a:srgbClr val="000000"/>
+              </a:buClr>
+              <a:buSzPct val="75000"/>
+              <a:buFont typeface="Symbol" charset="2"/>
+              <a:buChar char=""/>
+            </a:pPr>
+            <a:r>
+              <a:rPr b="0" lang="ru-RU" sz="1800" spc="-1" strike="noStrike">
+                <a:solidFill>
+                  <a:srgbClr val="000000"/>
+                </a:solidFill>
+                <a:latin typeface="XO Oriel"/>
+              </a:rPr>
+              <a:t>Четвёртый уровень структуры</a:t>
+            </a:r>
+            <a:endParaRPr b="0" lang="ru-RU" sz="1800" spc="-1" strike="noStrike">
+              <a:solidFill>
+                <a:srgbClr val="000000"/>
+              </a:solidFill>
+              <a:latin typeface="XO Oriel"/>
+            </a:endParaRPr>
+          </a:p>
+          <a:p>
+            <a:pPr lvl="4" marL="2160000" indent="-216000">
+              <a:spcBef>
+                <a:spcPts val="283"/>
+              </a:spcBef>
+              <a:buClr>
+                <a:srgbClr val="000000"/>
+              </a:buClr>
+              <a:buSzPct val="45000"/>
+              <a:buFont typeface="Wingdings" charset="2"/>
+              <a:buChar char=""/>
+            </a:pPr>
+            <a:r>
+              <a:rPr b="0" lang="ru-RU" sz="1800" spc="-1" strike="noStrike">
+                <a:solidFill>
+                  <a:srgbClr val="000000"/>
+                </a:solidFill>
+                <a:latin typeface="XO Oriel"/>
+              </a:rPr>
+              <a:t>Пятый уровень структуры</a:t>
+            </a:r>
+            <a:endParaRPr b="0" lang="ru-RU" sz="1800" spc="-1" strike="noStrike">
+              <a:solidFill>
+                <a:srgbClr val="000000"/>
+              </a:solidFill>
+              <a:latin typeface="XO Oriel"/>
+            </a:endParaRPr>
+          </a:p>
+          <a:p>
+            <a:pPr lvl="5" marL="2592000" indent="-216000">
+              <a:spcBef>
+                <a:spcPts val="283"/>
+              </a:spcBef>
+              <a:buClr>
+                <a:srgbClr val="000000"/>
+              </a:buClr>
+              <a:buSzPct val="45000"/>
+              <a:buFont typeface="Wingdings" charset="2"/>
+              <a:buChar char=""/>
+            </a:pPr>
+            <a:r>
+              <a:rPr b="0" lang="ru-RU" sz="1800" spc="-1" strike="noStrike">
+                <a:solidFill>
+                  <a:srgbClr val="000000"/>
+                </a:solidFill>
+                <a:latin typeface="XO Oriel"/>
+              </a:rPr>
+              <a:t>Шестой уровень структуры</a:t>
+            </a:r>
+            <a:endParaRPr b="0" lang="ru-RU" sz="1800" spc="-1" strike="noStrike">
+              <a:solidFill>
+                <a:srgbClr val="000000"/>
+              </a:solidFill>
+              <a:latin typeface="XO Oriel"/>
+            </a:endParaRPr>
+          </a:p>
+          <a:p>
+            <a:pPr lvl="6" marL="3024000" indent="-216000">
+              <a:spcBef>
+                <a:spcPts val="283"/>
+              </a:spcBef>
+              <a:buClr>
+                <a:srgbClr val="000000"/>
+              </a:buClr>
+              <a:buSzPct val="45000"/>
+              <a:buFont typeface="Wingdings" charset="2"/>
+              <a:buChar char=""/>
+            </a:pPr>
+            <a:r>
+              <a:rPr b="0" lang="ru-RU" sz="1800" spc="-1" strike="noStrike">
+                <a:solidFill>
+                  <a:srgbClr val="000000"/>
+                </a:solidFill>
+                <a:latin typeface="XO Oriel"/>
+              </a:rPr>
+              <a:t>Седьмой уровень структуры</a:t>
+            </a:r>
+            <a:endParaRPr b="0" lang="ru-RU" sz="1800" spc="-1" strike="noStrike">
+              <a:solidFill>
+                <a:srgbClr val="000000"/>
+              </a:solidFill>
+              <a:latin typeface="XO Oriel"/>
+            </a:endParaRPr>
+          </a:p>
+        </p:txBody>
+      </p:sp>
+      <p:sp>
+        <p:nvSpPr>
+          <p:cNvPr id="2" name="PlaceHolder 3"/>
+          <p:cNvSpPr>
+            <a:spLocks noGrp="1"/>
+          </p:cNvSpPr>
+          <p:nvPr>
+            <p:ph type="body"/>
+          </p:nvPr>
+        </p:nvSpPr>
+        <p:spPr>
+          <a:xfrm>
+            <a:off x="4674240" y="1203480"/>
+            <a:ext cx="4015440" cy="1422360"/>
+          </a:xfrm>
+          <a:prstGeom prst="rect">
+            <a:avLst/>
+          </a:prstGeom>
+          <a:noFill/>
+          <a:ln w="0">
+            <a:noFill/>
+          </a:ln>
+        </p:spPr>
+        <p:txBody>
+          <a:bodyPr lIns="0" rIns="0" tIns="0" bIns="0" anchor="t">
+            <a:normAutofit fontScale="43333"/>
+          </a:bodyPr>
+          <a:p>
+            <a:pPr marL="432000" indent="-324000">
+              <a:spcBef>
+                <a:spcPts val="1417"/>
+              </a:spcBef>
+              <a:buClr>
+                <a:srgbClr val="000000"/>
+              </a:buClr>
+              <a:buSzPct val="45000"/>
+              <a:buFont typeface="Wingdings" charset="2"/>
+              <a:buChar char=""/>
+            </a:pPr>
+            <a:r>
+              <a:rPr b="0" lang="ru-RU" sz="1800" spc="-1" strike="noStrike">
+                <a:solidFill>
+                  <a:srgbClr val="000000"/>
+                </a:solidFill>
+                <a:latin typeface="XO Oriel"/>
+              </a:rPr>
+              <a:t>Для правки структуры щёлкните мышью</a:t>
+            </a:r>
+            <a:endParaRPr b="0" lang="ru-RU" sz="1800" spc="-1" strike="noStrike">
+              <a:solidFill>
+                <a:srgbClr val="000000"/>
+              </a:solidFill>
+              <a:latin typeface="XO Oriel"/>
+            </a:endParaRPr>
+          </a:p>
+          <a:p>
+            <a:pPr lvl="1" marL="864000" indent="-324000">
+              <a:spcBef>
+                <a:spcPts val="1134"/>
+              </a:spcBef>
+              <a:buClr>
+                <a:srgbClr val="000000"/>
+              </a:buClr>
+              <a:buSzPct val="75000"/>
+              <a:buFont typeface="Symbol" charset="2"/>
+              <a:buChar char=""/>
+            </a:pPr>
+            <a:r>
+              <a:rPr b="0" lang="ru-RU" sz="1800" spc="-1" strike="noStrike">
+                <a:solidFill>
+                  <a:srgbClr val="000000"/>
+                </a:solidFill>
+                <a:latin typeface="XO Oriel"/>
+              </a:rPr>
+              <a:t>Второй уровень структуры</a:t>
+            </a:r>
+            <a:endParaRPr b="0" lang="ru-RU" sz="1800" spc="-1" strike="noStrike">
+              <a:solidFill>
+                <a:srgbClr val="000000"/>
+              </a:solidFill>
+              <a:latin typeface="XO Oriel"/>
+            </a:endParaRPr>
+          </a:p>
+          <a:p>
+            <a:pPr lvl="2" marL="1296000" indent="-288000">
+              <a:spcBef>
+                <a:spcPts val="850"/>
+              </a:spcBef>
+              <a:buClr>
+                <a:srgbClr val="000000"/>
+              </a:buClr>
+              <a:buSzPct val="45000"/>
+              <a:buFont typeface="Wingdings" charset="2"/>
+              <a:buChar char=""/>
+            </a:pPr>
+            <a:r>
+              <a:rPr b="0" lang="ru-RU" sz="1800" spc="-1" strike="noStrike">
+                <a:solidFill>
+                  <a:srgbClr val="000000"/>
+                </a:solidFill>
+                <a:latin typeface="XO Oriel"/>
+              </a:rPr>
+              <a:t>Третий уровень структуры</a:t>
+            </a:r>
+            <a:endParaRPr b="0" lang="ru-RU" sz="1800" spc="-1" strike="noStrike">
+              <a:solidFill>
+                <a:srgbClr val="000000"/>
+              </a:solidFill>
+              <a:latin typeface="XO Oriel"/>
+            </a:endParaRPr>
+          </a:p>
+          <a:p>
+            <a:pPr lvl="3" marL="1728000" indent="-216000">
+              <a:spcBef>
+                <a:spcPts val="567"/>
+              </a:spcBef>
+              <a:buClr>
+                <a:srgbClr val="000000"/>
+              </a:buClr>
+              <a:buSzPct val="75000"/>
+              <a:buFont typeface="Symbol" charset="2"/>
+              <a:buChar char=""/>
+            </a:pPr>
+            <a:r>
+              <a:rPr b="0" lang="ru-RU" sz="1800" spc="-1" strike="noStrike">
+                <a:solidFill>
+                  <a:srgbClr val="000000"/>
+                </a:solidFill>
+                <a:latin typeface="XO Oriel"/>
+              </a:rPr>
+              <a:t>Четвёртый уровень структуры</a:t>
+            </a:r>
+            <a:endParaRPr b="0" lang="ru-RU" sz="1800" spc="-1" strike="noStrike">
+              <a:solidFill>
+                <a:srgbClr val="000000"/>
+              </a:solidFill>
+              <a:latin typeface="XO Oriel"/>
+            </a:endParaRPr>
+          </a:p>
+          <a:p>
+            <a:pPr lvl="4" marL="2160000" indent="-216000">
+              <a:spcBef>
+                <a:spcPts val="283"/>
+              </a:spcBef>
+              <a:buClr>
+                <a:srgbClr val="000000"/>
+              </a:buClr>
+              <a:buSzPct val="45000"/>
+              <a:buFont typeface="Wingdings" charset="2"/>
+              <a:buChar char=""/>
+            </a:pPr>
+            <a:r>
+              <a:rPr b="0" lang="ru-RU" sz="1800" spc="-1" strike="noStrike">
+                <a:solidFill>
+                  <a:srgbClr val="000000"/>
+                </a:solidFill>
+                <a:latin typeface="XO Oriel"/>
+              </a:rPr>
+              <a:t>Пятый уровень структуры</a:t>
+            </a:r>
+            <a:endParaRPr b="0" lang="ru-RU" sz="1800" spc="-1" strike="noStrike">
+              <a:solidFill>
+                <a:srgbClr val="000000"/>
+              </a:solidFill>
+              <a:latin typeface="XO Oriel"/>
+            </a:endParaRPr>
+          </a:p>
+          <a:p>
+            <a:pPr lvl="5" marL="2592000" indent="-216000">
+              <a:spcBef>
+                <a:spcPts val="283"/>
+              </a:spcBef>
+              <a:buClr>
+                <a:srgbClr val="000000"/>
+              </a:buClr>
+              <a:buSzPct val="45000"/>
+              <a:buFont typeface="Wingdings" charset="2"/>
+              <a:buChar char=""/>
+            </a:pPr>
+            <a:r>
+              <a:rPr b="0" lang="ru-RU" sz="1800" spc="-1" strike="noStrike">
+                <a:solidFill>
+                  <a:srgbClr val="000000"/>
+                </a:solidFill>
+                <a:latin typeface="XO Oriel"/>
+              </a:rPr>
+              <a:t>Шестой уровень структуры</a:t>
+            </a:r>
+            <a:endParaRPr b="0" lang="ru-RU" sz="1800" spc="-1" strike="noStrike">
+              <a:solidFill>
+                <a:srgbClr val="000000"/>
+              </a:solidFill>
+              <a:latin typeface="XO Oriel"/>
+            </a:endParaRPr>
+          </a:p>
+          <a:p>
+            <a:pPr lvl="6" marL="3024000" indent="-216000">
+              <a:spcBef>
+                <a:spcPts val="283"/>
+              </a:spcBef>
+              <a:buClr>
+                <a:srgbClr val="000000"/>
+              </a:buClr>
+              <a:buSzPct val="45000"/>
+              <a:buFont typeface="Wingdings" charset="2"/>
+              <a:buChar char=""/>
+            </a:pPr>
+            <a:r>
+              <a:rPr b="0" lang="ru-RU" sz="1800" spc="-1" strike="noStrike">
+                <a:solidFill>
+                  <a:srgbClr val="000000"/>
+                </a:solidFill>
+                <a:latin typeface="XO Oriel"/>
+              </a:rPr>
+              <a:t>Седьмой уровень структуры</a:t>
+            </a:r>
+            <a:endParaRPr b="0" lang="ru-RU" sz="1800" spc="-1" strike="noStrike">
+              <a:solidFill>
+                <a:srgbClr val="000000"/>
+              </a:solidFill>
+              <a:latin typeface="XO Oriel"/>
+            </a:endParaRPr>
+          </a:p>
+        </p:txBody>
+      </p:sp>
+      <p:sp>
+        <p:nvSpPr>
+          <p:cNvPr id="3" name="PlaceHolder 4"/>
+          <p:cNvSpPr>
+            <a:spLocks noGrp="1"/>
+          </p:cNvSpPr>
+          <p:nvPr>
+            <p:ph type="body"/>
+          </p:nvPr>
+        </p:nvSpPr>
+        <p:spPr>
+          <a:xfrm>
+            <a:off x="457200" y="2761920"/>
+            <a:ext cx="8228880" cy="1422360"/>
+          </a:xfrm>
+          <a:prstGeom prst="rect">
+            <a:avLst/>
+          </a:prstGeom>
+          <a:noFill/>
+          <a:ln w="0">
+            <a:noFill/>
+          </a:ln>
+        </p:spPr>
+        <p:txBody>
+          <a:bodyPr lIns="0" rIns="0" tIns="0" bIns="0" anchor="t">
+            <a:normAutofit fontScale="50000"/>
+          </a:bodyPr>
+          <a:p>
+            <a:pPr marL="432000" indent="-324000">
+              <a:spcBef>
+                <a:spcPts val="1417"/>
+              </a:spcBef>
+              <a:buClr>
+                <a:srgbClr val="000000"/>
+              </a:buClr>
+              <a:buSzPct val="45000"/>
+              <a:buFont typeface="Wingdings" charset="2"/>
+              <a:buChar char=""/>
+            </a:pPr>
+            <a:r>
+              <a:rPr b="0" lang="ru-RU" sz="1800" spc="-1" strike="noStrike">
+                <a:solidFill>
+                  <a:srgbClr val="000000"/>
+                </a:solidFill>
+                <a:latin typeface="XO Oriel"/>
+              </a:rPr>
+              <a:t>Для правки структуры щёлкните мышью</a:t>
+            </a:r>
+            <a:endParaRPr b="0" lang="ru-RU" sz="1800" spc="-1" strike="noStrike">
+              <a:solidFill>
+                <a:srgbClr val="000000"/>
+              </a:solidFill>
+              <a:latin typeface="XO Oriel"/>
+            </a:endParaRPr>
+          </a:p>
+          <a:p>
+            <a:pPr lvl="1" marL="864000" indent="-324000">
+              <a:spcBef>
+                <a:spcPts val="1134"/>
+              </a:spcBef>
+              <a:buClr>
+                <a:srgbClr val="000000"/>
+              </a:buClr>
+              <a:buSzPct val="75000"/>
+              <a:buFont typeface="Symbol" charset="2"/>
+              <a:buChar char=""/>
+            </a:pPr>
+            <a:r>
+              <a:rPr b="0" lang="ru-RU" sz="1800" spc="-1" strike="noStrike">
+                <a:solidFill>
+                  <a:srgbClr val="000000"/>
+                </a:solidFill>
+                <a:latin typeface="XO Oriel"/>
+              </a:rPr>
+              <a:t>Второй уровень структуры</a:t>
+            </a:r>
+            <a:endParaRPr b="0" lang="ru-RU" sz="1800" spc="-1" strike="noStrike">
+              <a:solidFill>
+                <a:srgbClr val="000000"/>
+              </a:solidFill>
+              <a:latin typeface="XO Oriel"/>
+            </a:endParaRPr>
+          </a:p>
+          <a:p>
+            <a:pPr lvl="2" marL="1296000" indent="-288000">
+              <a:spcBef>
+                <a:spcPts val="850"/>
+              </a:spcBef>
+              <a:buClr>
+                <a:srgbClr val="000000"/>
+              </a:buClr>
+              <a:buSzPct val="45000"/>
+              <a:buFont typeface="Wingdings" charset="2"/>
+              <a:buChar char=""/>
+            </a:pPr>
+            <a:r>
+              <a:rPr b="0" lang="ru-RU" sz="1800" spc="-1" strike="noStrike">
+                <a:solidFill>
+                  <a:srgbClr val="000000"/>
+                </a:solidFill>
+                <a:latin typeface="XO Oriel"/>
+              </a:rPr>
+              <a:t>Третий уровень структуры</a:t>
+            </a:r>
+            <a:endParaRPr b="0" lang="ru-RU" sz="1800" spc="-1" strike="noStrike">
+              <a:solidFill>
+                <a:srgbClr val="000000"/>
+              </a:solidFill>
+              <a:latin typeface="XO Oriel"/>
+            </a:endParaRPr>
+          </a:p>
+          <a:p>
+            <a:pPr lvl="3" marL="1728000" indent="-216000">
+              <a:spcBef>
+                <a:spcPts val="567"/>
+              </a:spcBef>
+              <a:buClr>
+                <a:srgbClr val="000000"/>
+              </a:buClr>
+              <a:buSzPct val="75000"/>
+              <a:buFont typeface="Symbol" charset="2"/>
+              <a:buChar char=""/>
+            </a:pPr>
+            <a:r>
+              <a:rPr b="0" lang="ru-RU" sz="1800" spc="-1" strike="noStrike">
+                <a:solidFill>
+                  <a:srgbClr val="000000"/>
+                </a:solidFill>
+                <a:latin typeface="XO Oriel"/>
+              </a:rPr>
+              <a:t>Четвёртый уровень структуры</a:t>
+            </a:r>
+            <a:endParaRPr b="0" lang="ru-RU" sz="1800" spc="-1" strike="noStrike">
+              <a:solidFill>
+                <a:srgbClr val="000000"/>
+              </a:solidFill>
+              <a:latin typeface="XO Oriel"/>
+            </a:endParaRPr>
+          </a:p>
+          <a:p>
+            <a:pPr lvl="4" marL="2160000" indent="-216000">
+              <a:spcBef>
+                <a:spcPts val="283"/>
+              </a:spcBef>
+              <a:buClr>
+                <a:srgbClr val="000000"/>
+              </a:buClr>
+              <a:buSzPct val="45000"/>
+              <a:buFont typeface="Wingdings" charset="2"/>
+              <a:buChar char=""/>
+            </a:pPr>
+            <a:r>
+              <a:rPr b="0" lang="ru-RU" sz="1800" spc="-1" strike="noStrike">
+                <a:solidFill>
+                  <a:srgbClr val="000000"/>
+                </a:solidFill>
+                <a:latin typeface="XO Oriel"/>
+              </a:rPr>
+              <a:t>Пятый уровень структуры</a:t>
+            </a:r>
+            <a:endParaRPr b="0" lang="ru-RU" sz="1800" spc="-1" strike="noStrike">
+              <a:solidFill>
+                <a:srgbClr val="000000"/>
+              </a:solidFill>
+              <a:latin typeface="XO Oriel"/>
+            </a:endParaRPr>
+          </a:p>
+          <a:p>
+            <a:pPr lvl="5" marL="2592000" indent="-216000">
+              <a:spcBef>
+                <a:spcPts val="283"/>
+              </a:spcBef>
+              <a:buClr>
+                <a:srgbClr val="000000"/>
+              </a:buClr>
+              <a:buSzPct val="45000"/>
+              <a:buFont typeface="Wingdings" charset="2"/>
+              <a:buChar char=""/>
+            </a:pPr>
+            <a:r>
+              <a:rPr b="0" lang="ru-RU" sz="1800" spc="-1" strike="noStrike">
+                <a:solidFill>
+                  <a:srgbClr val="000000"/>
+                </a:solidFill>
+                <a:latin typeface="XO Oriel"/>
+              </a:rPr>
+              <a:t>Шестой уровень структуры</a:t>
+            </a:r>
+            <a:endParaRPr b="0" lang="ru-RU" sz="1800" spc="-1" strike="noStrike">
+              <a:solidFill>
+                <a:srgbClr val="000000"/>
+              </a:solidFill>
+              <a:latin typeface="XO Oriel"/>
+            </a:endParaRPr>
+          </a:p>
+          <a:p>
+            <a:pPr lvl="6" marL="3024000" indent="-216000">
+              <a:spcBef>
+                <a:spcPts val="283"/>
+              </a:spcBef>
+              <a:buClr>
+                <a:srgbClr val="000000"/>
+              </a:buClr>
+              <a:buSzPct val="45000"/>
+              <a:buFont typeface="Wingdings" charset="2"/>
+              <a:buChar char=""/>
+            </a:pPr>
+            <a:r>
+              <a:rPr b="0" lang="ru-RU" sz="1800" spc="-1" strike="noStrike">
+                <a:solidFill>
+                  <a:srgbClr val="000000"/>
+                </a:solidFill>
+                <a:latin typeface="XO Oriel"/>
+              </a:rPr>
+              <a:t>Седьмой уровень структуры</a:t>
+            </a:r>
+            <a:endParaRPr b="0" lang="ru-RU" sz="1800" spc="-1" strike="noStrike">
+              <a:solidFill>
+                <a:srgbClr val="000000"/>
+              </a:solidFill>
+              <a:latin typeface="XO Oriel"/>
+            </a:endParaRPr>
+          </a:p>
+        </p:txBody>
+      </p:sp>
+      <p:sp>
+        <p:nvSpPr>
+          <p:cNvPr id="4" name="PlaceHolder 5"/>
+          <p:cNvSpPr>
+            <a:spLocks noGrp="1"/>
+          </p:cNvSpPr>
+          <p:nvPr>
             <p:ph type="ftr" idx="1"/>
           </p:nvPr>
         </p:nvSpPr>
         <p:spPr>
           <a:xfrm>
             <a:off x="3029040" y="4767120"/>
-            <a:ext cx="3085560" cy="273240"/>
+            <a:ext cx="3085200" cy="272880"/>
           </a:xfrm>
           <a:prstGeom prst="rect">
             <a:avLst/>
@@ -2627,7 +3302,13 @@
           </a:bodyPr>
           <a:lstStyle>
             <a:lvl1pPr indent="0" algn="ctr">
+              <a:lnSpc>
+                <a:spcPct val="100000"/>
+              </a:lnSpc>
               <a:buNone/>
+              <a:tabLst>
+                <a:tab algn="l" pos="0"/>
+              </a:tabLst>
               <a:defRPr b="0" lang="ru-RU" sz="1400" spc="-1" strike="noStrike">
                 <a:solidFill>
                   <a:srgbClr val="000000"/>
@@ -2638,7 +3319,13 @@
           </a:lstStyle>
           <a:p>
             <a:pPr indent="0" algn="ctr">
+              <a:lnSpc>
+                <a:spcPct val="100000"/>
+              </a:lnSpc>
               <a:buNone/>
+              <a:tabLst>
+                <a:tab algn="l" pos="0"/>
+              </a:tabLst>
             </a:pPr>
             <a:r>
               <a:rPr b="0" lang="ru-RU" sz="1400" spc="-1" strike="noStrike">
@@ -2660,7 +3347,7 @@
       </p:sp>
       <p:sp>
         <p:nvSpPr>
-          <p:cNvPr id="2" name="PlaceHolder 3"/>
+          <p:cNvPr id="5" name="PlaceHolder 6"/>
           <p:cNvSpPr>
             <a:spLocks noGrp="1"/>
           </p:cNvSpPr>
@@ -2671,7 +3358,7 @@
         <p:spPr>
           <a:xfrm>
             <a:off x="6458040" y="4767120"/>
-            <a:ext cx="2056680" cy="273240"/>
+            <a:ext cx="2056320" cy="272880"/>
           </a:xfrm>
           <a:prstGeom prst="rect">
             <a:avLst/>
@@ -2713,7 +3400,7 @@
                 <a:tab algn="l" pos="0"/>
               </a:tabLst>
             </a:pPr>
-            <a:fld id="{4EC1B125-AFE2-48BC-9A9F-78B56795708B}" type="slidenum">
+            <a:fld id="{0F79FB85-8A60-426B-9C88-B75F0CF5C429}" type="slidenum">
               <a:rPr b="0" lang="ru-RU" sz="900" spc="-1" strike="noStrike">
                 <a:solidFill>
                   <a:srgbClr val="888888"/>
@@ -2734,7 +3421,7 @@
       </p:sp>
       <p:sp>
         <p:nvSpPr>
-          <p:cNvPr id="3" name="PlaceHolder 4"/>
+          <p:cNvPr id="6" name="PlaceHolder 7"/>
           <p:cNvSpPr>
             <a:spLocks noGrp="1"/>
           </p:cNvSpPr>
@@ -2745,7 +3432,7 @@
         <p:spPr>
           <a:xfrm>
             <a:off x="628560" y="4767120"/>
-            <a:ext cx="2056680" cy="273240"/>
+            <a:ext cx="2056320" cy="272880"/>
           </a:xfrm>
           <a:prstGeom prst="rect">
             <a:avLst/>
@@ -2788,231 +3475,6 @@
                 <a:srgbClr val="000000"/>
               </a:solidFill>
               <a:latin typeface="Times New Roman"/>
-            </a:endParaRPr>
-          </a:p>
-        </p:txBody>
-      </p:sp>
-      <p:sp>
-        <p:nvSpPr>
-          <p:cNvPr id="4" name="PlaceHolder 5"/>
-          <p:cNvSpPr>
-            <a:spLocks noGrp="1"/>
-          </p:cNvSpPr>
-          <p:nvPr>
-            <p:ph type="body"/>
-          </p:nvPr>
-        </p:nvSpPr>
-        <p:spPr>
-          <a:xfrm>
-            <a:off x="457200" y="1203480"/>
-            <a:ext cx="8229240" cy="2982960"/>
-          </a:xfrm>
-          <a:prstGeom prst="rect">
-            <a:avLst/>
-          </a:prstGeom>
-          <a:noFill/>
-          <a:ln w="0">
-            <a:noFill/>
-          </a:ln>
-        </p:spPr>
-        <p:txBody>
-          <a:bodyPr lIns="0" rIns="0" tIns="0" bIns="0" anchor="t">
-            <a:normAutofit/>
-          </a:bodyPr>
-          <a:p>
-            <a:pPr marL="432000" indent="-324000">
-              <a:spcBef>
-                <a:spcPts val="1417"/>
-              </a:spcBef>
-              <a:buClr>
-                <a:srgbClr val="000000"/>
-              </a:buClr>
-              <a:buSzPct val="45000"/>
-              <a:buFont typeface="Wingdings" charset="2"/>
-              <a:buChar char=""/>
-            </a:pPr>
-            <a:r>
-              <a:rPr b="0" lang="ru-RU" sz="1400" spc="-1" strike="noStrike">
-                <a:solidFill>
-                  <a:srgbClr val="000000"/>
-                </a:solidFill>
-                <a:latin typeface="Arial"/>
-              </a:rPr>
-              <a:t>Для правки структуры щёлкните мышью</a:t>
-            </a:r>
-            <a:endParaRPr b="0" lang="ru-RU" sz="1400" spc="-1" strike="noStrike">
-              <a:solidFill>
-                <a:srgbClr val="000000"/>
-              </a:solidFill>
-              <a:latin typeface="Arial"/>
-            </a:endParaRPr>
-          </a:p>
-          <a:p>
-            <a:pPr lvl="1" marL="864000" indent="-324000">
-              <a:spcBef>
-                <a:spcPts val="1134"/>
-              </a:spcBef>
-              <a:buClr>
-                <a:srgbClr val="000000"/>
-              </a:buClr>
-              <a:buSzPct val="75000"/>
-              <a:buFont typeface="Symbol" charset="2"/>
-              <a:buChar char=""/>
-            </a:pPr>
-            <a:r>
-              <a:rPr b="0" lang="ru-RU" sz="1400" spc="-1" strike="noStrike">
-                <a:solidFill>
-                  <a:srgbClr val="000000"/>
-                </a:solidFill>
-                <a:latin typeface="Arial"/>
-              </a:rPr>
-              <a:t>Второй уровень структуры</a:t>
-            </a:r>
-            <a:endParaRPr b="0" lang="ru-RU" sz="1400" spc="-1" strike="noStrike">
-              <a:solidFill>
-                <a:srgbClr val="000000"/>
-              </a:solidFill>
-              <a:latin typeface="Arial"/>
-            </a:endParaRPr>
-          </a:p>
-          <a:p>
-            <a:pPr lvl="2" marL="1296000" indent="-288000">
-              <a:spcBef>
-                <a:spcPts val="850"/>
-              </a:spcBef>
-              <a:buClr>
-                <a:srgbClr val="000000"/>
-              </a:buClr>
-              <a:buSzPct val="45000"/>
-              <a:buFont typeface="Wingdings" charset="2"/>
-              <a:buChar char=""/>
-            </a:pPr>
-            <a:r>
-              <a:rPr b="0" lang="ru-RU" sz="1400" spc="-1" strike="noStrike">
-                <a:solidFill>
-                  <a:srgbClr val="000000"/>
-                </a:solidFill>
-                <a:latin typeface="Arial"/>
-              </a:rPr>
-              <a:t>Третий уровень структуры</a:t>
-            </a:r>
-            <a:endParaRPr b="0" lang="ru-RU" sz="1400" spc="-1" strike="noStrike">
-              <a:solidFill>
-                <a:srgbClr val="000000"/>
-              </a:solidFill>
-              <a:latin typeface="Arial"/>
-            </a:endParaRPr>
-          </a:p>
-          <a:p>
-            <a:pPr lvl="3" marL="1728000" indent="-216000">
-              <a:spcBef>
-                <a:spcPts val="567"/>
-              </a:spcBef>
-              <a:buClr>
-                <a:srgbClr val="000000"/>
-              </a:buClr>
-              <a:buSzPct val="75000"/>
-              <a:buFont typeface="Symbol" charset="2"/>
-              <a:buChar char=""/>
-            </a:pPr>
-            <a:r>
-              <a:rPr b="0" lang="ru-RU" sz="1400" spc="-1" strike="noStrike">
-                <a:solidFill>
-                  <a:srgbClr val="000000"/>
-                </a:solidFill>
-                <a:latin typeface="Arial"/>
-              </a:rPr>
-              <a:t>Четвёртый уровень структуры</a:t>
-            </a:r>
-            <a:endParaRPr b="0" lang="ru-RU" sz="1400" spc="-1" strike="noStrike">
-              <a:solidFill>
-                <a:srgbClr val="000000"/>
-              </a:solidFill>
-              <a:latin typeface="Arial"/>
-            </a:endParaRPr>
-          </a:p>
-          <a:p>
-            <a:pPr lvl="4" marL="2160000" indent="-216000">
-              <a:spcBef>
-                <a:spcPts val="283"/>
-              </a:spcBef>
-              <a:buClr>
-                <a:srgbClr val="000000"/>
-              </a:buClr>
-              <a:buSzPct val="45000"/>
-              <a:buFont typeface="Wingdings" charset="2"/>
-              <a:buChar char=""/>
-            </a:pPr>
-            <a:r>
-              <a:rPr b="0" lang="ru-RU" sz="2000" spc="-1" strike="noStrike">
-                <a:solidFill>
-                  <a:srgbClr val="000000"/>
-                </a:solidFill>
-                <a:latin typeface="Arial"/>
-              </a:rPr>
-              <a:t>Пятый уровень структуры</a:t>
-            </a:r>
-            <a:endParaRPr b="0" lang="ru-RU" sz="2000" spc="-1" strike="noStrike">
-              <a:solidFill>
-                <a:srgbClr val="000000"/>
-              </a:solidFill>
-              <a:latin typeface="Arial"/>
-            </a:endParaRPr>
-          </a:p>
-          <a:p>
-            <a:pPr lvl="5" marL="2592000" indent="-216000">
-              <a:spcBef>
-                <a:spcPts val="283"/>
-              </a:spcBef>
-              <a:buClr>
-                <a:srgbClr val="000000"/>
-              </a:buClr>
-              <a:buSzPct val="45000"/>
-              <a:buFont typeface="Wingdings" charset="2"/>
-              <a:buChar char=""/>
-            </a:pPr>
-            <a:r>
-              <a:rPr b="0" lang="ru-RU" sz="2000" spc="-1" strike="noStrike">
-                <a:solidFill>
-                  <a:srgbClr val="000000"/>
-                </a:solidFill>
-                <a:latin typeface="Arial"/>
-              </a:rPr>
-              <a:t>Шестой уровень структуры</a:t>
-            </a:r>
-            <a:endParaRPr b="0" lang="ru-RU" sz="2000" spc="-1" strike="noStrike">
-              <a:solidFill>
-                <a:srgbClr val="000000"/>
-              </a:solidFill>
-              <a:latin typeface="Arial"/>
-            </a:endParaRPr>
-          </a:p>
-          <a:p>
-            <a:pPr lvl="6" marL="3024000" indent="-216000">
-              <a:spcBef>
-                <a:spcPts val="283"/>
-              </a:spcBef>
-              <a:buClr>
-                <a:srgbClr val="000000"/>
-              </a:buClr>
-              <a:buSzPct val="45000"/>
-              <a:buFont typeface="Wingdings" charset="2"/>
-              <a:buChar char=""/>
-            </a:pPr>
-            <a:r>
-              <a:rPr b="0" lang="ru-RU" sz="2000" spc="-1" strike="noStrike">
-                <a:solidFill>
-                  <a:srgbClr val="000000"/>
-                </a:solidFill>
-                <a:latin typeface="Arial"/>
-              </a:rPr>
-              <a:t>Седьмой уровень структуры</a:t>
-            </a:r>
-            <a:endParaRPr b="0" lang="ru-RU" sz="2000" spc="-1" strike="noStrike">
-              <a:solidFill>
-                <a:srgbClr val="000000"/>
-              </a:solidFill>
-              <a:latin typeface="Arial"/>
             </a:endParaRPr>
           </a:p>
         </p:txBody>
@@ -3064,14 +3526,14 @@
       </p:grpSpPr>
       <p:sp>
         <p:nvSpPr>
-          <p:cNvPr id="41" name="Google Shape;99;p1"/>
+          <p:cNvPr id="43" name="Google Shape;99;p1"/>
           <p:cNvSpPr/>
           <p:nvPr/>
         </p:nvSpPr>
         <p:spPr>
           <a:xfrm>
             <a:off x="1042920" y="720000"/>
-            <a:ext cx="7057080" cy="830160"/>
+            <a:ext cx="7056720" cy="829800"/>
           </a:xfrm>
           <a:prstGeom prst="rect">
             <a:avLst/>
@@ -3121,7 +3583,7 @@
       </p:sp>
       <p:pic>
         <p:nvPicPr>
-          <p:cNvPr id="42" name="Google Shape;100;p1" descr=""/>
+          <p:cNvPr id="44" name="Google Shape;100;p1" descr=""/>
           <p:cNvPicPr/>
           <p:nvPr/>
         </p:nvPicPr>
@@ -3133,7 +3595,7 @@
         <p:spPr>
           <a:xfrm>
             <a:off x="3426120" y="2935440"/>
-            <a:ext cx="2291040" cy="1881720"/>
+            <a:ext cx="2290680" cy="1881360"/>
           </a:xfrm>
           <a:prstGeom prst="rect">
             <a:avLst/>
@@ -3145,14 +3607,14 @@
       </p:pic>
       <p:sp>
         <p:nvSpPr>
-          <p:cNvPr id="43" name="Google Shape;101;p1"/>
+          <p:cNvPr id="45" name="Google Shape;101;p1"/>
           <p:cNvSpPr/>
           <p:nvPr/>
         </p:nvSpPr>
         <p:spPr>
           <a:xfrm>
             <a:off x="1980000" y="2085840"/>
-            <a:ext cx="5039640" cy="303120"/>
+            <a:ext cx="5039280" cy="303120"/>
           </a:xfrm>
           <a:prstGeom prst="rect">
             <a:avLst/>
@@ -3232,14 +3694,14 @@
       </p:grpSpPr>
       <p:sp>
         <p:nvSpPr>
-          <p:cNvPr id="44" name="Google Shape;106;p3"/>
+          <p:cNvPr id="46" name="Google Shape;106;p3"/>
           <p:cNvSpPr/>
           <p:nvPr/>
         </p:nvSpPr>
         <p:spPr>
           <a:xfrm>
             <a:off x="114480" y="208080"/>
-            <a:ext cx="5847840" cy="808920"/>
+            <a:ext cx="5847480" cy="808560"/>
           </a:xfrm>
           <a:prstGeom prst="roundRect">
             <a:avLst>
@@ -3260,7 +3722,7 @@
           <a:fontRef idx="minor"/>
         </p:style>
         <p:txBody>
-          <a:bodyPr tIns="91440" bIns="91440" anchor="ctr">
+          <a:bodyPr lIns="90000" rIns="90000" tIns="91440" bIns="91440" anchor="ctr">
             <a:noAutofit/>
           </a:bodyPr>
           <a:p>
@@ -3283,14 +3745,14 @@
       </p:sp>
       <p:sp>
         <p:nvSpPr>
-          <p:cNvPr id="45" name="Google Shape;107;p3"/>
+          <p:cNvPr id="47" name="Google Shape;107;p3"/>
           <p:cNvSpPr/>
           <p:nvPr/>
         </p:nvSpPr>
         <p:spPr>
           <a:xfrm>
             <a:off x="200160" y="326520"/>
-            <a:ext cx="5847840" cy="808920"/>
+            <a:ext cx="5847480" cy="808560"/>
           </a:xfrm>
           <a:prstGeom prst="roundRect">
             <a:avLst>
@@ -3311,7 +3773,7 @@
           <a:fontRef idx="minor"/>
         </p:style>
         <p:txBody>
-          <a:bodyPr tIns="91440" bIns="91440" anchor="ctr">
+          <a:bodyPr lIns="90000" rIns="90000" tIns="91440" bIns="91440" anchor="ctr">
             <a:noAutofit/>
           </a:bodyPr>
           <a:p>
@@ -3334,7 +3796,7 @@
       </p:sp>
       <p:sp>
         <p:nvSpPr>
-          <p:cNvPr id="46" name="PlaceHolder 1"/>
+          <p:cNvPr id="48" name="PlaceHolder 1"/>
           <p:cNvSpPr>
             <a:spLocks noGrp="1"/>
           </p:cNvSpPr>
@@ -3345,7 +3807,7 @@
         <p:spPr>
           <a:xfrm>
             <a:off x="360000" y="360000"/>
-            <a:ext cx="5645880" cy="725040"/>
+            <a:ext cx="5645520" cy="724680"/>
           </a:xfrm>
           <a:prstGeom prst="rect">
             <a:avLst/>
@@ -3385,21 +3847,21 @@
               <a:solidFill>
                 <a:srgbClr val="000000"/>
               </a:solidFill>
-              <a:latin typeface="Arial"/>
-            </a:endParaRPr>
-          </a:p>
-        </p:txBody>
-      </p:sp>
-      <p:sp>
-        <p:nvSpPr>
-          <p:cNvPr id="47" name="Google Shape;109;p3"/>
+              <a:latin typeface="XO Oriel"/>
+            </a:endParaRPr>
+          </a:p>
+        </p:txBody>
+      </p:sp>
+      <p:sp>
+        <p:nvSpPr>
+          <p:cNvPr id="49" name="Google Shape;109;p3"/>
           <p:cNvSpPr/>
           <p:nvPr/>
         </p:nvSpPr>
         <p:spPr>
           <a:xfrm>
             <a:off x="529200" y="1407240"/>
-            <a:ext cx="7843320" cy="3364560"/>
+            <a:ext cx="7842960" cy="3364200"/>
           </a:xfrm>
           <a:prstGeom prst="rect">
             <a:avLst/>
@@ -3416,7 +3878,7 @@
           <a:fontRef idx="minor"/>
         </p:style>
         <p:txBody>
-          <a:bodyPr lIns="0" tIns="91440" bIns="91440" anchor="t">
+          <a:bodyPr lIns="0" rIns="90000" tIns="91440" bIns="91440" anchor="t">
             <a:normAutofit/>
           </a:bodyPr>
           <a:p>
@@ -3436,7 +3898,7 @@
                 <a:latin typeface="Montserrat"/>
                 <a:ea typeface="Montserrat"/>
               </a:rPr>
-              <a:t>Цель: улучшение стандартной версия игры Flappy Bird</a:t>
+              <a:t>Цель: улучшении стандартной версия игры Flappy Bird</a:t>
             </a:r>
             <a:endParaRPr b="0" lang="ru-RU" sz="1400" spc="-1" strike="noStrike">
               <a:solidFill>
@@ -3514,7 +3976,7 @@
             </a:endParaRPr>
           </a:p>
           <a:p>
-            <a:pPr algn="just">
+            <a:pPr marL="457200" algn="just">
               <a:lnSpc>
                 <a:spcPct val="100000"/>
               </a:lnSpc>
@@ -3703,14 +4165,14 @@
       </p:grpSpPr>
       <p:sp>
         <p:nvSpPr>
-          <p:cNvPr id="48" name="Google Shape;114;p6"/>
+          <p:cNvPr id="50" name="Google Shape;114;p6"/>
           <p:cNvSpPr/>
           <p:nvPr/>
         </p:nvSpPr>
         <p:spPr>
           <a:xfrm>
             <a:off x="114480" y="208080"/>
-            <a:ext cx="5847840" cy="808920"/>
+            <a:ext cx="5847480" cy="808560"/>
           </a:xfrm>
           <a:prstGeom prst="roundRect">
             <a:avLst>
@@ -3731,7 +4193,7 @@
           <a:fontRef idx="minor"/>
         </p:style>
         <p:txBody>
-          <a:bodyPr tIns="91440" bIns="91440" anchor="ctr">
+          <a:bodyPr lIns="90000" rIns="90000" tIns="91440" bIns="91440" anchor="ctr">
             <a:noAutofit/>
           </a:bodyPr>
           <a:p>
@@ -3754,14 +4216,14 @@
       </p:sp>
       <p:sp>
         <p:nvSpPr>
-          <p:cNvPr id="49" name="Google Shape;115;p6"/>
+          <p:cNvPr id="51" name="Google Shape;115;p6"/>
           <p:cNvSpPr/>
           <p:nvPr/>
         </p:nvSpPr>
         <p:spPr>
           <a:xfrm>
             <a:off x="200160" y="326520"/>
-            <a:ext cx="5847840" cy="808920"/>
+            <a:ext cx="5847480" cy="808560"/>
           </a:xfrm>
           <a:prstGeom prst="roundRect">
             <a:avLst>
@@ -3782,7 +4244,7 @@
           <a:fontRef idx="minor"/>
         </p:style>
         <p:txBody>
-          <a:bodyPr tIns="91440" bIns="91440" anchor="ctr">
+          <a:bodyPr lIns="90000" rIns="90000" tIns="91440" bIns="91440" anchor="ctr">
             <a:noAutofit/>
           </a:bodyPr>
           <a:p>
@@ -3805,7 +4267,7 @@
       </p:sp>
       <p:sp>
         <p:nvSpPr>
-          <p:cNvPr id="50" name="PlaceHolder 1"/>
+          <p:cNvPr id="52" name="PlaceHolder 1"/>
           <p:cNvSpPr>
             <a:spLocks noGrp="1"/>
           </p:cNvSpPr>
@@ -3816,7 +4278,7 @@
         <p:spPr>
           <a:xfrm>
             <a:off x="360000" y="444960"/>
-            <a:ext cx="5242320" cy="572040"/>
+            <a:ext cx="5241960" cy="571680"/>
           </a:xfrm>
           <a:prstGeom prst="rect">
             <a:avLst/>
@@ -3854,14 +4316,14 @@
               <a:solidFill>
                 <a:srgbClr val="000000"/>
               </a:solidFill>
-              <a:latin typeface="Arial"/>
+              <a:latin typeface="XO Oriel"/>
             </a:endParaRPr>
           </a:p>
         </p:txBody>
       </p:sp>
       <p:pic>
         <p:nvPicPr>
-          <p:cNvPr id="51" name="Google Shape;117;p6" descr=""/>
+          <p:cNvPr id="53" name="Google Shape;117;p6" descr=""/>
           <p:cNvPicPr/>
           <p:nvPr/>
         </p:nvPicPr>
@@ -3872,7 +4334,7 @@
         <p:spPr>
           <a:xfrm>
             <a:off x="360000" y="1404000"/>
-            <a:ext cx="6246360" cy="3207240"/>
+            <a:ext cx="6246000" cy="3206880"/>
           </a:xfrm>
           <a:prstGeom prst="rect">
             <a:avLst/>
@@ -3914,14 +4376,14 @@
       </p:grpSpPr>
       <p:sp>
         <p:nvSpPr>
-          <p:cNvPr id="52" name="Google Shape;122;p7"/>
+          <p:cNvPr id="54" name="Google Shape;122;p7"/>
           <p:cNvSpPr/>
           <p:nvPr/>
         </p:nvSpPr>
         <p:spPr>
           <a:xfrm>
             <a:off x="114480" y="208080"/>
-            <a:ext cx="5847840" cy="808920"/>
+            <a:ext cx="5847480" cy="808560"/>
           </a:xfrm>
           <a:prstGeom prst="roundRect">
             <a:avLst>
@@ -3942,7 +4404,7 @@
           <a:fontRef idx="minor"/>
         </p:style>
         <p:txBody>
-          <a:bodyPr tIns="91440" bIns="91440" anchor="ctr">
+          <a:bodyPr lIns="90000" rIns="90000" tIns="91440" bIns="91440" anchor="ctr">
             <a:noAutofit/>
           </a:bodyPr>
           <a:p>
@@ -3965,14 +4427,14 @@
       </p:sp>
       <p:sp>
         <p:nvSpPr>
-          <p:cNvPr id="53" name="Google Shape;123;p7"/>
+          <p:cNvPr id="55" name="Google Shape;123;p7"/>
           <p:cNvSpPr/>
           <p:nvPr/>
         </p:nvSpPr>
         <p:spPr>
           <a:xfrm>
             <a:off x="200160" y="326520"/>
-            <a:ext cx="5847840" cy="808920"/>
+            <a:ext cx="5847480" cy="808560"/>
           </a:xfrm>
           <a:prstGeom prst="roundRect">
             <a:avLst>
@@ -3993,7 +4455,7 @@
           <a:fontRef idx="minor"/>
         </p:style>
         <p:txBody>
-          <a:bodyPr tIns="91440" bIns="91440" anchor="ctr">
+          <a:bodyPr lIns="90000" rIns="90000" tIns="91440" bIns="91440" anchor="ctr">
             <a:noAutofit/>
           </a:bodyPr>
           <a:p>
@@ -4016,7 +4478,7 @@
       </p:sp>
       <p:sp>
         <p:nvSpPr>
-          <p:cNvPr id="54" name="PlaceHolder 1"/>
+          <p:cNvPr id="56" name="PlaceHolder 1"/>
           <p:cNvSpPr>
             <a:spLocks noGrp="1"/>
           </p:cNvSpPr>
@@ -4027,7 +4489,7 @@
         <p:spPr>
           <a:xfrm>
             <a:off x="360000" y="444960"/>
-            <a:ext cx="5242320" cy="572040"/>
+            <a:ext cx="5241960" cy="571680"/>
           </a:xfrm>
           <a:prstGeom prst="rect">
             <a:avLst/>
@@ -4065,21 +4527,21 @@
               <a:solidFill>
                 <a:srgbClr val="000000"/>
               </a:solidFill>
-              <a:latin typeface="Arial"/>
-            </a:endParaRPr>
-          </a:p>
-        </p:txBody>
-      </p:sp>
-      <p:sp>
-        <p:nvSpPr>
-          <p:cNvPr id="55" name="Google Shape;125;p7"/>
+              <a:latin typeface="XO Oriel"/>
+            </a:endParaRPr>
+          </a:p>
+        </p:txBody>
+      </p:sp>
+      <p:sp>
+        <p:nvSpPr>
+          <p:cNvPr id="57" name="Google Shape;125;p7"/>
           <p:cNvSpPr/>
           <p:nvPr/>
         </p:nvSpPr>
         <p:spPr>
           <a:xfrm>
             <a:off x="232920" y="1265040"/>
-            <a:ext cx="7871400" cy="3364560"/>
+            <a:ext cx="7871040" cy="3364200"/>
           </a:xfrm>
           <a:prstGeom prst="rect">
             <a:avLst/>
@@ -4096,7 +4558,7 @@
           <a:fontRef idx="minor"/>
         </p:style>
         <p:txBody>
-          <a:bodyPr lIns="0" tIns="91440" bIns="91440" anchor="t">
+          <a:bodyPr lIns="0" rIns="90000" tIns="91440" bIns="91440" anchor="t">
             <a:normAutofit/>
           </a:bodyPr>
           <a:p>
@@ -4119,7 +4581,7 @@
       </p:sp>
       <p:pic>
         <p:nvPicPr>
-          <p:cNvPr id="56" name="" descr=""/>
+          <p:cNvPr id="58" name="" descr=""/>
           <p:cNvPicPr/>
           <p:nvPr/>
         </p:nvPicPr>
@@ -4130,7 +4592,7 @@
         <p:spPr>
           <a:xfrm>
             <a:off x="230760" y="1246680"/>
-            <a:ext cx="3189240" cy="1993320"/>
+            <a:ext cx="3188880" cy="1992960"/>
           </a:xfrm>
           <a:prstGeom prst="rect">
             <a:avLst/>
@@ -4142,7 +4604,7 @@
       </p:pic>
       <p:pic>
         <p:nvPicPr>
-          <p:cNvPr id="57" name="" descr=""/>
+          <p:cNvPr id="59" name="" descr=""/>
           <p:cNvPicPr/>
           <p:nvPr/>
         </p:nvPicPr>
@@ -4153,7 +4615,7 @@
         <p:spPr>
           <a:xfrm>
             <a:off x="5220000" y="1260000"/>
-            <a:ext cx="3240000" cy="2025000"/>
+            <a:ext cx="3239640" cy="2024640"/>
           </a:xfrm>
           <a:prstGeom prst="rect">
             <a:avLst/>
@@ -4165,7 +4627,7 @@
       </p:pic>
       <p:pic>
         <p:nvPicPr>
-          <p:cNvPr id="58" name="" descr=""/>
+          <p:cNvPr id="60" name="" descr=""/>
           <p:cNvPicPr/>
           <p:nvPr/>
         </p:nvPicPr>
@@ -4176,7 +4638,7 @@
         <p:spPr>
           <a:xfrm>
             <a:off x="2700000" y="3231000"/>
-            <a:ext cx="3060000" cy="1912680"/>
+            <a:ext cx="3059640" cy="1912320"/>
           </a:xfrm>
           <a:prstGeom prst="rect">
             <a:avLst/>
@@ -4218,14 +4680,14 @@
       </p:grpSpPr>
       <p:sp>
         <p:nvSpPr>
-          <p:cNvPr id="59" name="Google Shape;132;g3ce8891a6d8_0_11"/>
+          <p:cNvPr id="61" name="Google Shape;132;g3ce8891a6d8_0_11"/>
           <p:cNvSpPr/>
           <p:nvPr/>
         </p:nvSpPr>
         <p:spPr>
           <a:xfrm>
             <a:off x="114480" y="208080"/>
-            <a:ext cx="5847840" cy="808920"/>
+            <a:ext cx="5847480" cy="808560"/>
           </a:xfrm>
           <a:prstGeom prst="roundRect">
             <a:avLst>
@@ -4246,7 +4708,7 @@
           <a:fontRef idx="minor"/>
         </p:style>
         <p:txBody>
-          <a:bodyPr tIns="91440" bIns="91440" anchor="ctr">
+          <a:bodyPr lIns="90000" rIns="90000" tIns="91440" bIns="91440" anchor="ctr">
             <a:noAutofit/>
           </a:bodyPr>
           <a:p>
@@ -4269,14 +4731,14 @@
       </p:sp>
       <p:sp>
         <p:nvSpPr>
-          <p:cNvPr id="60" name="Google Shape;133;g3ce8891a6d8_0_11"/>
+          <p:cNvPr id="62" name="Google Shape;133;g3ce8891a6d8_0_11"/>
           <p:cNvSpPr/>
           <p:nvPr/>
         </p:nvSpPr>
         <p:spPr>
           <a:xfrm>
             <a:off x="200160" y="326520"/>
-            <a:ext cx="5847840" cy="808920"/>
+            <a:ext cx="5847480" cy="808560"/>
           </a:xfrm>
           <a:prstGeom prst="roundRect">
             <a:avLst>
@@ -4297,7 +4759,7 @@
           <a:fontRef idx="minor"/>
         </p:style>
         <p:txBody>
-          <a:bodyPr tIns="91440" bIns="91440" anchor="ctr">
+          <a:bodyPr lIns="90000" rIns="90000" tIns="91440" bIns="91440" anchor="ctr">
             <a:noAutofit/>
           </a:bodyPr>
           <a:p>
@@ -4320,7 +4782,7 @@
       </p:sp>
       <p:sp>
         <p:nvSpPr>
-          <p:cNvPr id="61" name="PlaceHolder 1"/>
+          <p:cNvPr id="63" name="PlaceHolder 1"/>
           <p:cNvSpPr>
             <a:spLocks noGrp="1"/>
           </p:cNvSpPr>
@@ -4331,7 +4793,7 @@
         <p:spPr>
           <a:xfrm>
             <a:off x="360000" y="444960"/>
-            <a:ext cx="5242320" cy="572040"/>
+            <a:ext cx="5241960" cy="571680"/>
           </a:xfrm>
           <a:prstGeom prst="rect">
             <a:avLst/>
@@ -4369,14 +4831,14 @@
               <a:solidFill>
                 <a:srgbClr val="000000"/>
               </a:solidFill>
-              <a:latin typeface="Arial"/>
+              <a:latin typeface="XO Oriel"/>
             </a:endParaRPr>
           </a:p>
         </p:txBody>
       </p:sp>
       <p:pic>
         <p:nvPicPr>
-          <p:cNvPr id="62" name="Google Shape;135;g3ce8891a6d8_0_11" descr=""/>
+          <p:cNvPr id="64" name="Google Shape;135;g3ce8891a6d8_0_11" descr=""/>
           <p:cNvPicPr/>
           <p:nvPr/>
         </p:nvPicPr>
@@ -4387,7 +4849,7 @@
         <p:spPr>
           <a:xfrm>
             <a:off x="200160" y="1236600"/>
-            <a:ext cx="4709520" cy="3702600"/>
+            <a:ext cx="4709160" cy="3702240"/>
           </a:xfrm>
           <a:prstGeom prst="rect">
             <a:avLst/>
@@ -4429,14 +4891,14 @@
       </p:grpSpPr>
       <p:sp>
         <p:nvSpPr>
-          <p:cNvPr id="63" name="Google Shape;140;p9"/>
+          <p:cNvPr id="65" name="Google Shape;140;p9"/>
           <p:cNvSpPr/>
           <p:nvPr/>
         </p:nvSpPr>
         <p:spPr>
           <a:xfrm>
             <a:off x="114480" y="208080"/>
-            <a:ext cx="5847840" cy="808920"/>
+            <a:ext cx="5847480" cy="808560"/>
           </a:xfrm>
           <a:prstGeom prst="roundRect">
             <a:avLst>
@@ -4457,7 +4919,7 @@
           <a:fontRef idx="minor"/>
         </p:style>
         <p:txBody>
-          <a:bodyPr tIns="91440" bIns="91440" anchor="ctr">
+          <a:bodyPr lIns="90000" rIns="90000" tIns="91440" bIns="91440" anchor="ctr">
             <a:noAutofit/>
           </a:bodyPr>
           <a:p>
@@ -4480,14 +4942,14 @@
       </p:sp>
       <p:sp>
         <p:nvSpPr>
-          <p:cNvPr id="64" name="Google Shape;141;p9"/>
+          <p:cNvPr id="66" name="Google Shape;141;p9"/>
           <p:cNvSpPr/>
           <p:nvPr/>
         </p:nvSpPr>
         <p:spPr>
           <a:xfrm>
             <a:off x="200160" y="326520"/>
-            <a:ext cx="5847840" cy="808920"/>
+            <a:ext cx="5847480" cy="808560"/>
           </a:xfrm>
           <a:prstGeom prst="roundRect">
             <a:avLst>
@@ -4508,7 +4970,7 @@
           <a:fontRef idx="minor"/>
         </p:style>
         <p:txBody>
-          <a:bodyPr tIns="91440" bIns="91440" anchor="ctr">
+          <a:bodyPr lIns="90000" rIns="90000" tIns="91440" bIns="91440" anchor="ctr">
             <a:noAutofit/>
           </a:bodyPr>
           <a:p>
@@ -4531,7 +4993,7 @@
       </p:sp>
       <p:sp>
         <p:nvSpPr>
-          <p:cNvPr id="65" name="PlaceHolder 1"/>
+          <p:cNvPr id="67" name="PlaceHolder 1"/>
           <p:cNvSpPr>
             <a:spLocks noGrp="1"/>
           </p:cNvSpPr>
@@ -4542,7 +5004,7 @@
         <p:spPr>
           <a:xfrm>
             <a:off x="360000" y="444960"/>
-            <a:ext cx="5242320" cy="572040"/>
+            <a:ext cx="5241960" cy="571680"/>
           </a:xfrm>
           <a:prstGeom prst="rect">
             <a:avLst/>
@@ -4590,7 +5052,7 @@
               <a:solidFill>
                 <a:srgbClr val="000000"/>
               </a:solidFill>
-              <a:latin typeface="Arial"/>
+              <a:latin typeface="XO Oriel"/>
             </a:endParaRPr>
           </a:p>
           <a:p>
@@ -4607,21 +5069,21 @@
               <a:solidFill>
                 <a:srgbClr val="000000"/>
               </a:solidFill>
-              <a:latin typeface="Arial"/>
-            </a:endParaRPr>
-          </a:p>
-        </p:txBody>
-      </p:sp>
-      <p:sp>
-        <p:nvSpPr>
-          <p:cNvPr id="66" name="Google Shape;143;p9"/>
+              <a:latin typeface="XO Oriel"/>
+            </a:endParaRPr>
+          </a:p>
+        </p:txBody>
+      </p:sp>
+      <p:sp>
+        <p:nvSpPr>
+          <p:cNvPr id="68" name="Google Shape;143;p9"/>
           <p:cNvSpPr/>
           <p:nvPr/>
         </p:nvSpPr>
         <p:spPr>
           <a:xfrm>
             <a:off x="200160" y="1265040"/>
-            <a:ext cx="8571240" cy="3723120"/>
+            <a:ext cx="8570880" cy="3722760"/>
           </a:xfrm>
           <a:prstGeom prst="rect">
             <a:avLst/>
@@ -4638,7 +5100,7 @@
           <a:fontRef idx="minor"/>
         </p:style>
         <p:txBody>
-          <a:bodyPr lIns="0" tIns="91440" bIns="91440" anchor="t">
+          <a:bodyPr lIns="0" rIns="90000" tIns="91440" bIns="91440" anchor="t">
             <a:noAutofit/>
           </a:bodyPr>
           <a:p>
@@ -4949,14 +5411,14 @@
       </p:grpSpPr>
       <p:sp>
         <p:nvSpPr>
-          <p:cNvPr id="67" name="Google Shape;148;g3c89bc5bec0_0_0"/>
+          <p:cNvPr id="69" name="Google Shape;148;g3c89bc5bec0_0_0"/>
           <p:cNvSpPr/>
           <p:nvPr/>
         </p:nvSpPr>
         <p:spPr>
           <a:xfrm>
             <a:off x="114480" y="208080"/>
-            <a:ext cx="5847840" cy="808920"/>
+            <a:ext cx="5847480" cy="808560"/>
           </a:xfrm>
           <a:prstGeom prst="roundRect">
             <a:avLst>
@@ -4977,7 +5439,7 @@
           <a:fontRef idx="minor"/>
         </p:style>
         <p:txBody>
-          <a:bodyPr tIns="91440" bIns="91440" anchor="ctr">
+          <a:bodyPr lIns="90000" rIns="90000" tIns="91440" bIns="91440" anchor="ctr">
             <a:noAutofit/>
           </a:bodyPr>
           <a:p>
@@ -5000,14 +5462,14 @@
       </p:sp>
       <p:sp>
         <p:nvSpPr>
-          <p:cNvPr id="68" name="Google Shape;149;g3c89bc5bec0_0_0"/>
+          <p:cNvPr id="70" name="Google Shape;149;g3c89bc5bec0_0_0"/>
           <p:cNvSpPr/>
           <p:nvPr/>
         </p:nvSpPr>
         <p:spPr>
           <a:xfrm>
             <a:off x="200160" y="326520"/>
-            <a:ext cx="5847840" cy="808920"/>
+            <a:ext cx="5847480" cy="808560"/>
           </a:xfrm>
           <a:prstGeom prst="roundRect">
             <a:avLst>
@@ -5028,7 +5490,7 @@
           <a:fontRef idx="minor"/>
         </p:style>
         <p:txBody>
-          <a:bodyPr tIns="91440" bIns="91440" anchor="ctr">
+          <a:bodyPr lIns="90000" rIns="90000" tIns="91440" bIns="91440" anchor="ctr">
             <a:noAutofit/>
           </a:bodyPr>
           <a:p>
@@ -5051,7 +5513,7 @@
       </p:sp>
       <p:sp>
         <p:nvSpPr>
-          <p:cNvPr id="69" name="PlaceHolder 1"/>
+          <p:cNvPr id="71" name="PlaceHolder 1"/>
           <p:cNvSpPr>
             <a:spLocks noGrp="1"/>
           </p:cNvSpPr>
@@ -5062,7 +5524,7 @@
         <p:spPr>
           <a:xfrm>
             <a:off x="360000" y="444960"/>
-            <a:ext cx="5242320" cy="572040"/>
+            <a:ext cx="5241960" cy="571680"/>
           </a:xfrm>
           <a:prstGeom prst="rect">
             <a:avLst/>
@@ -5100,21 +5562,21 @@
               <a:solidFill>
                 <a:srgbClr val="000000"/>
               </a:solidFill>
-              <a:latin typeface="Arial"/>
-            </a:endParaRPr>
-          </a:p>
-        </p:txBody>
-      </p:sp>
-      <p:sp>
-        <p:nvSpPr>
-          <p:cNvPr id="70" name="Google Shape;151;g3c89bc5bec0_0_0"/>
+              <a:latin typeface="XO Oriel"/>
+            </a:endParaRPr>
+          </a:p>
+        </p:txBody>
+      </p:sp>
+      <p:sp>
+        <p:nvSpPr>
+          <p:cNvPr id="72" name="Google Shape;151;g3c89bc5bec0_0_0"/>
           <p:cNvSpPr/>
           <p:nvPr/>
         </p:nvSpPr>
         <p:spPr>
           <a:xfrm>
             <a:off x="317880" y="1271160"/>
-            <a:ext cx="8535240" cy="3620520"/>
+            <a:ext cx="8534880" cy="3620160"/>
           </a:xfrm>
           <a:prstGeom prst="rect">
             <a:avLst/>
@@ -5131,7 +5593,7 @@
           <a:fontRef idx="minor"/>
         </p:style>
         <p:txBody>
-          <a:bodyPr tIns="91440" bIns="91440" anchor="t">
+          <a:bodyPr lIns="90000" rIns="90000" tIns="91440" bIns="91440" anchor="t">
             <a:noAutofit/>
           </a:bodyPr>
           <a:p>
@@ -5151,7 +5613,7 @@
                 <a:latin typeface="Montserrat"/>
                 <a:ea typeface="Montserrat"/>
               </a:rPr>
-              <a:t>Защита данных проекта не нужна так как ничего не берется и сохраняется.</a:t>
+              <a:t>Защита данных по ТЗ не требуется</a:t>
             </a:r>
             <a:endParaRPr b="0" lang="ru-RU" sz="1400" spc="-1" strike="noStrike">
               <a:solidFill>
@@ -5194,7 +5656,7 @@
       </p:grpSpPr>
       <p:sp>
         <p:nvSpPr>
-          <p:cNvPr id="71" name="PlaceHolder 1"/>
+          <p:cNvPr id="73" name="PlaceHolder 1"/>
           <p:cNvSpPr>
             <a:spLocks noGrp="1"/>
           </p:cNvSpPr>
@@ -5205,7 +5667,7 @@
         <p:spPr>
           <a:xfrm>
             <a:off x="200160" y="1326960"/>
-            <a:ext cx="8631720" cy="3241080"/>
+            <a:ext cx="8631360" cy="3240720"/>
           </a:xfrm>
           <a:prstGeom prst="rect">
             <a:avLst/>
@@ -5243,7 +5705,7 @@
               <a:solidFill>
                 <a:srgbClr val="000000"/>
               </a:solidFill>
-              <a:latin typeface="Arial"/>
+              <a:latin typeface="XO Oriel"/>
             </a:endParaRPr>
           </a:p>
           <a:p>
@@ -5260,21 +5722,21 @@
               <a:solidFill>
                 <a:srgbClr val="000000"/>
               </a:solidFill>
-              <a:latin typeface="Arial"/>
-            </a:endParaRPr>
-          </a:p>
-        </p:txBody>
-      </p:sp>
-      <p:sp>
-        <p:nvSpPr>
-          <p:cNvPr id="72" name="Google Shape;157;p10"/>
+              <a:latin typeface="XO Oriel"/>
+            </a:endParaRPr>
+          </a:p>
+        </p:txBody>
+      </p:sp>
+      <p:sp>
+        <p:nvSpPr>
+          <p:cNvPr id="74" name="Google Shape;157;p10"/>
           <p:cNvSpPr/>
           <p:nvPr/>
         </p:nvSpPr>
         <p:spPr>
           <a:xfrm>
             <a:off x="114480" y="208080"/>
-            <a:ext cx="5847840" cy="808920"/>
+            <a:ext cx="5847480" cy="808560"/>
           </a:xfrm>
           <a:prstGeom prst="roundRect">
             <a:avLst>
@@ -5295,7 +5757,7 @@
           <a:fontRef idx="minor"/>
         </p:style>
         <p:txBody>
-          <a:bodyPr tIns="91440" bIns="91440" anchor="ctr">
+          <a:bodyPr lIns="90000" rIns="90000" tIns="91440" bIns="91440" anchor="ctr">
             <a:noAutofit/>
           </a:bodyPr>
           <a:p>
@@ -5318,14 +5780,14 @@
       </p:sp>
       <p:sp>
         <p:nvSpPr>
-          <p:cNvPr id="73" name="Google Shape;158;p10"/>
+          <p:cNvPr id="75" name="Google Shape;158;p10"/>
           <p:cNvSpPr/>
           <p:nvPr/>
         </p:nvSpPr>
         <p:spPr>
           <a:xfrm>
             <a:off x="200160" y="326520"/>
-            <a:ext cx="5847840" cy="808920"/>
+            <a:ext cx="5847480" cy="808560"/>
           </a:xfrm>
           <a:prstGeom prst="roundRect">
             <a:avLst>
@@ -5346,7 +5808,7 @@
           <a:fontRef idx="minor"/>
         </p:style>
         <p:txBody>
-          <a:bodyPr tIns="91440" bIns="91440" anchor="ctr">
+          <a:bodyPr lIns="90000" rIns="90000" tIns="91440" bIns="91440" anchor="ctr">
             <a:noAutofit/>
           </a:bodyPr>
           <a:p>

--- a/Flappy Bird Enhanced.pptx
+++ b/Flappy Bird Enhanced.pptx
@@ -70,7 +70,7 @@
         <p:txBody>
           <a:bodyPr/>
           <a:p>
-            <a:fld id="{27D52013-D64C-422F-A849-61271013A84D}" type="slidenum">
+            <a:fld id="{BDDD6E72-E95F-4A73-BD90-9FE70BCA8445}" type="slidenum">
               <a:t>&lt;#&gt;</a:t>
             </a:fld>
           </a:p>
@@ -279,7 +279,7 @@
         <p:txBody>
           <a:bodyPr/>
           <a:p>
-            <a:fld id="{62583868-CE97-4F14-80DC-AA0EDB55717B}" type="slidenum">
+            <a:fld id="{ECEDABBB-3101-40BE-B2EE-0CCB65A33DB5}" type="slidenum">
               <a:t>&lt;#&gt;</a:t>
             </a:fld>
           </a:p>
@@ -574,7 +574,7 @@
         <p:txBody>
           <a:bodyPr/>
           <a:p>
-            <a:fld id="{81BF5549-7EF8-4C6F-B71F-AD58173C36D0}" type="slidenum">
+            <a:fld id="{3B2D6F9E-3CAB-4575-9051-B396A71E03C1}" type="slidenum">
               <a:t>&lt;#&gt;</a:t>
             </a:fld>
           </a:p>
@@ -955,7 +955,7 @@
         <p:txBody>
           <a:bodyPr/>
           <a:p>
-            <a:fld id="{3C0252D0-0E36-412E-A6A6-2E50218C7E13}" type="slidenum">
+            <a:fld id="{C8D4C086-19E6-4B94-998D-35CAFCAD1F49}" type="slidenum">
               <a:t>&lt;#&gt;</a:t>
             </a:fld>
           </a:p>
@@ -1118,7 +1118,7 @@
         <p:txBody>
           <a:bodyPr/>
           <a:p>
-            <a:fld id="{33BD147E-5FDA-4598-8006-E855AD643354}" type="slidenum">
+            <a:fld id="{7EAA5E94-6F70-4F6A-B7F2-608968EEDB13}" type="slidenum">
               <a:t>&lt;#&gt;</a:t>
             </a:fld>
           </a:p>
@@ -1284,7 +1284,7 @@
         <p:txBody>
           <a:bodyPr/>
           <a:p>
-            <a:fld id="{74BEB91E-4EA3-42EB-A440-CB48A81EB8F2}" type="slidenum">
+            <a:fld id="{1E3D5BC7-3708-4B42-B476-AE443A0A9557}" type="slidenum">
               <a:t>&lt;#&gt;</a:t>
             </a:fld>
           </a:p>
@@ -1493,7 +1493,7 @@
         <p:txBody>
           <a:bodyPr/>
           <a:p>
-            <a:fld id="{156DDA69-736A-4F2D-8E48-AA6A601FBF5C}" type="slidenum">
+            <a:fld id="{EDF670B8-1B81-4289-BF8D-B0144A4A42E1}" type="slidenum">
               <a:t>&lt;#&gt;</a:t>
             </a:fld>
           </a:p>
@@ -1616,7 +1616,7 @@
         <p:txBody>
           <a:bodyPr/>
           <a:p>
-            <a:fld id="{0276902D-3A4C-4240-9AF8-67A751906E89}" type="slidenum">
+            <a:fld id="{2B41731F-75AA-4C4C-9FA9-02356B48D236}" type="slidenum">
               <a:t>&lt;#&gt;</a:t>
             </a:fld>
           </a:p>
@@ -1737,7 +1737,7 @@
         <p:txBody>
           <a:bodyPr/>
           <a:p>
-            <a:fld id="{725E1CA6-9699-4260-BC70-231A7D5B04AA}" type="slidenum">
+            <a:fld id="{FCCB8CAC-0EF2-446D-B441-5A3FB5BD949B}" type="slidenum">
               <a:t>&lt;#&gt;</a:t>
             </a:fld>
           </a:p>
@@ -1989,7 +1989,7 @@
         <p:txBody>
           <a:bodyPr/>
           <a:p>
-            <a:fld id="{7ECEF18B-F6BD-4EE7-A973-88C5A3E0BF0B}" type="slidenum">
+            <a:fld id="{5690079C-7762-44E7-8752-116C8E3F3899}" type="slidenum">
               <a:t>&lt;#&gt;</a:t>
             </a:fld>
           </a:p>
@@ -2241,7 +2241,7 @@
         <p:txBody>
           <a:bodyPr/>
           <a:p>
-            <a:fld id="{87F0EC71-012E-40B7-9EA0-8226CED84489}" type="slidenum">
+            <a:fld id="{6502B675-EC95-4DC3-B93C-551EA1E24427}" type="slidenum">
               <a:t>&lt;#&gt;</a:t>
             </a:fld>
           </a:p>
@@ -2493,7 +2493,7 @@
         <p:txBody>
           <a:bodyPr/>
           <a:p>
-            <a:fld id="{85E12839-1D23-4913-8640-D0A13609620C}" type="slidenum">
+            <a:fld id="{C42F6560-5A0C-46D2-AF2B-B30A20FC5A3E}" type="slidenum">
               <a:t>&lt;#&gt;</a:t>
             </a:fld>
           </a:p>
@@ -3400,7 +3400,7 @@
                 <a:tab algn="l" pos="0"/>
               </a:tabLst>
             </a:pPr>
-            <a:fld id="{0F79FB85-8A60-426B-9C88-B75F0CF5C429}" type="slidenum">
+            <a:fld id="{746979B6-8B59-4AA8-B164-60D0E9A3AAC2}" type="slidenum">
               <a:rPr b="0" lang="ru-RU" sz="900" spc="-1" strike="noStrike">
                 <a:solidFill>
                   <a:srgbClr val="888888"/>
